--- a/FixGrid_Innovation_Presentation.pptx
+++ b/FixGrid_Innovation_Presentation.pptx
@@ -597,7 +597,7 @@
           <a:p>
             <a:r>
               <a:rPr lang="en-US" dirty="0"/>
-              <a:t>FixGrid operates as a dual-pillar innovation: a live web platform providing escrow, directory discovery, and warranties, coupled with the SafeProbe handheld hardware wand for roadside mechanics.</a:t>
+              <a:t>From the synopsis: India’s $15.2B unorganized repair economy suffers a dual crisis: a trust void where 78% of consumers discard repairable electronics, and a diagnostic void where mechanics lack affordable tools, misdiagnosing a ₹10 capacitor as a dead motherboard.</a:t>
             </a:r>
             <a:endParaRPr lang="en-US" dirty="0"/>
           </a:p>
@@ -685,7 +685,7 @@
           <a:p>
             <a:r>
               <a:rPr lang="en-US" dirty="0"/>
-              <a:t>The problem requires solving both ends: fixing the trust void with our web platform and fixing the diagnostic barrier with our handheld probe.</a:t>
+              <a:t>From the synopsis: SafeProbe merges physics and digital governance. It tests in-circuit at 0.40V without desoldering, snaps macro photos of 0402 SMDs, links to a Dual-Loop QR warranty seal, and acts as a hardware trust-gate releasing escrow.</a:t>
             </a:r>
             <a:endParaRPr lang="en-US" dirty="0"/>
           </a:p>
@@ -861,7 +861,7 @@
           <a:p>
             <a:r>
               <a:rPr lang="en-US" dirty="0"/>
-              <a:t>Here is our live website at www.vytron.me: featuring 21 repair categories, real-time shop hours, smart escrow, and verified local shop listings.</a:t>
+              <a:t>Here is our live website at fixgrid.vytron.me: featuring 21 repair categories, real-time shop hours, smart escrow, and verified local shop listings.</a:t>
             </a:r>
             <a:endParaRPr lang="en-US" dirty="0"/>
           </a:p>
@@ -1639,7 +1639,7 @@
                 <a:ea typeface="Calibri" pitchFamily="34" charset="-122"/>
                 <a:cs typeface="Calibri" pitchFamily="34" charset="-120"/>
               </a:rPr>
-              <a:t>The Complete Ecosystem: A Live Web Platform (www.vytron.me) &amp; A Frugal Handheld Diagnostic Wand Championing Sustainable Electronics Repair</a:t>
+              <a:t>The Complete Ecosystem: A Live Web Platform (fixgrid.vytron.me) &amp; A Frugal Handheld Diagnostic Wand Championing Sustainable Repair Across All 21+ Categories</a:t>
             </a:r>
             <a:endParaRPr lang="en-US" sz="1200" dirty="0"/>
           </a:p>
@@ -1705,7 +1705,7 @@
                 <a:ea typeface="Calibri" pitchFamily="34" charset="-122"/>
                 <a:cs typeface="Calibri" pitchFamily="34" charset="-120"/>
               </a:rPr>
-              <a:t>✓  Live Digital Platform: Neighborhood search, escrow &amp; warranties</a:t>
+              <a:t>✓  Live Digital Platform: Search &amp; escrow across 21+ categories (Appliances, Tech, EVs)</a:t>
             </a:r>
             <a:endParaRPr lang="en-US" sz="950" dirty="0"/>
           </a:p>
@@ -1771,7 +1771,7 @@
                 <a:ea typeface="Calibri" pitchFamily="34" charset="-122"/>
                 <a:cs typeface="Calibri" pitchFamily="34" charset="-120"/>
               </a:rPr>
-              <a:t>✓  Physical Innovation: Under ₹1,200 SafeProbe™ diagnostic wand</a:t>
+              <a:t>✓  Physical Innovation: Under ₹1,800 SafeProbe™ sub-junction diagnostic wand</a:t>
             </a:r>
             <a:endParaRPr lang="en-US" sz="950" dirty="0"/>
           </a:p>
@@ -1951,7 +1951,7 @@
                 <a:ea typeface="Calibri" pitchFamily="34" charset="-122"/>
                 <a:cs typeface="Calibri" pitchFamily="34" charset="-120"/>
               </a:rPr>
-              <a:t>Live Platform: www.vytron.me</a:t>
+              <a:t>Live Platform: fixgrid.vytron.me</a:t>
             </a:r>
             <a:endParaRPr lang="en-US" sz="800" dirty="0"/>
           </a:p>
@@ -2143,7 +2143,7 @@
                 <a:ea typeface="Calibri" pitchFamily="34" charset="-122"/>
                 <a:cs typeface="Calibri" pitchFamily="34" charset="-120"/>
               </a:rPr>
-              <a:t>www.vytron.me</a:t>
+              <a:t>fixgrid.vytron.me</a:t>
             </a:r>
             <a:endParaRPr lang="en-US" sz="900" dirty="0"/>
           </a:p>
@@ -2292,7 +2292,7 @@
                 <a:ea typeface="Calibri" pitchFamily="34" charset="-122"/>
                 <a:cs typeface="Calibri" pitchFamily="34" charset="-120"/>
               </a:rPr>
-              <a:t>// 02 • EXECUTIVE SUMMARY</a:t>
+              <a:t>// 02 • PROBLEM STATEMENT</a:t>
             </a:r>
             <a:endParaRPr lang="en-US" sz="900" dirty="0"/>
           </a:p>
@@ -2389,7 +2389,7 @@
               <a:buNone/>
             </a:pPr>
             <a:r>
-              <a:rPr lang="en-US" sz="2300" b="1" dirty="0">
+              <a:rPr lang="en-US" sz="2050" b="1" dirty="0">
                 <a:solidFill>
                   <a:srgbClr val="FFFFFF"/>
                 </a:solidFill>
@@ -2397,9 +2397,9 @@
                 <a:ea typeface="Cambria" pitchFamily="34" charset="-122"/>
                 <a:cs typeface="Cambria" pitchFamily="34" charset="-120"/>
               </a:rPr>
-              <a:t>The Two-Pillar Repair Ecosystem</a:t>
-            </a:r>
-            <a:endParaRPr lang="en-US" sz="2300" dirty="0"/>
+              <a:t>Problem Statement: The Throwaway Culture &amp; Climate Paradox</a:t>
+            </a:r>
+            <a:endParaRPr lang="en-US" sz="2050" dirty="0"/>
           </a:p>
         </p:txBody>
       </p:sp>
@@ -2412,11 +2412,331 @@
         <p:spPr>
           <a:xfrm>
             <a:off x="548640" y="1234440"/>
-            <a:ext cx="3886200" cy="2423160"/>
+            <a:ext cx="3886200" cy="1874520"/>
           </a:xfrm>
           <a:prstGeom prst="roundRect">
             <a:avLst>
-              <a:gd name="adj" fmla="val 3019"/>
+              <a:gd name="adj" fmla="val 3902"/>
+            </a:avLst>
+          </a:prstGeom>
+          <a:solidFill>
+            <a:srgbClr val="2A0E17"/>
+          </a:solidFill>
+          <a:ln w="12700">
+            <a:solidFill>
+              <a:srgbClr val="E11D48"/>
+            </a:solidFill>
+            <a:prstDash val="solid"/>
+          </a:ln>
+        </p:spPr>
+      </p:sp>
+      <p:sp>
+        <p:nvSpPr>
+          <p:cNvPr id="7" name="Text 5"/>
+          <p:cNvSpPr/>
+          <p:nvPr/>
+        </p:nvSpPr>
+        <p:spPr>
+          <a:xfrm>
+            <a:off x="731520" y="1353312"/>
+            <a:ext cx="3520440" cy="256032"/>
+          </a:xfrm>
+          <a:prstGeom prst="rect">
+            <a:avLst/>
+          </a:prstGeom>
+          <a:noFill/>
+          <a:ln/>
+        </p:spPr>
+        <p:txBody>
+          <a:bodyPr wrap="square" rtlCol="0" anchor="ctr"/>
+          <a:lstStyle/>
+          <a:p>
+            <a:pPr indent="0" marL="0">
+              <a:buNone/>
+            </a:pPr>
+            <a:r>
+              <a:rPr lang="en-US" sz="1200" b="1" dirty="0">
+                <a:solidFill>
+                  <a:srgbClr val="FB7185"/>
+                </a:solidFill>
+                <a:latin typeface="Calibri" pitchFamily="34" charset="0"/>
+                <a:ea typeface="Calibri" pitchFamily="34" charset="-122"/>
+                <a:cs typeface="Calibri" pitchFamily="34" charset="-120"/>
+              </a:rPr>
+              <a:t>1. The Trust Void Across All 21+ Categories</a:t>
+            </a:r>
+            <a:endParaRPr lang="en-US" sz="1200" dirty="0"/>
+          </a:p>
+        </p:txBody>
+      </p:sp>
+      <p:sp>
+        <p:nvSpPr>
+          <p:cNvPr id="8" name="Text 6"/>
+          <p:cNvSpPr/>
+          <p:nvPr/>
+        </p:nvSpPr>
+        <p:spPr>
+          <a:xfrm>
+            <a:off x="731520" y="1645920"/>
+            <a:ext cx="3520440" cy="1325880"/>
+          </a:xfrm>
+          <a:prstGeom prst="rect">
+            <a:avLst/>
+          </a:prstGeom>
+          <a:noFill/>
+          <a:ln/>
+        </p:spPr>
+        <p:txBody>
+          <a:bodyPr wrap="square" rtlCol="0" anchor="ctr"/>
+          <a:lstStyle/>
+          <a:p>
+            <a:pPr marL="342900" indent="-342900">
+              <a:lnSpc>
+                <a:spcPct val="115000"/>
+              </a:lnSpc>
+              <a:spcAft>
+                <a:spcPts val="400"/>
+              </a:spcAft>
+              <a:buSzPct val="100000"/>
+              <a:buChar char="•"/>
+            </a:pPr>
+            <a:r>
+              <a:rPr lang="en-US" sz="880" dirty="0">
+                <a:solidFill>
+                  <a:srgbClr val="CBD5E1"/>
+                </a:solidFill>
+                <a:latin typeface="Calibri" pitchFamily="34" charset="0"/>
+                <a:ea typeface="Calibri" pitchFamily="34" charset="-122"/>
+                <a:cs typeface="Calibri" pitchFamily="34" charset="-120"/>
+              </a:rPr>
+              <a:t>78% of consumers discard repairable goods (appliances, consumer tech, tools) fearing arbitrary pricing &amp; zero warranty.</a:t>
+            </a:r>
+            <a:endParaRPr lang="en-US" sz="880" dirty="0"/>
+          </a:p>
+          <a:p>
+            <a:pPr marL="342900" indent="-342900">
+              <a:lnSpc>
+                <a:spcPct val="115000"/>
+              </a:lnSpc>
+              <a:spcAft>
+                <a:spcPts val="400"/>
+              </a:spcAft>
+              <a:buSzPct val="100000"/>
+              <a:buChar char="•"/>
+            </a:pPr>
+            <a:r>
+              <a:rPr lang="en-US" sz="880" dirty="0">
+                <a:solidFill>
+                  <a:srgbClr val="CBD5E1"/>
+                </a:solidFill>
+                <a:latin typeface="Calibri" pitchFamily="34" charset="0"/>
+                <a:ea typeface="Calibri" pitchFamily="34" charset="-122"/>
+                <a:cs typeface="Calibri" pitchFamily="34" charset="-120"/>
+              </a:rPr>
+              <a:t>Spans ALL 21+ categories: Major home appliances (ACs, fridges, washing machines), laptops, phones, TVs &amp; EVs.</a:t>
+            </a:r>
+            <a:endParaRPr lang="en-US" sz="880" dirty="0"/>
+          </a:p>
+          <a:p>
+            <a:pPr marL="342900" indent="-342900">
+              <a:lnSpc>
+                <a:spcPct val="115000"/>
+              </a:lnSpc>
+              <a:spcAft>
+                <a:spcPts val="400"/>
+              </a:spcAft>
+              <a:buSzPct val="100000"/>
+              <a:buChar char="•"/>
+            </a:pPr>
+            <a:r>
+              <a:rPr lang="en-US" sz="880" dirty="0">
+                <a:solidFill>
+                  <a:srgbClr val="CBD5E1"/>
+                </a:solidFill>
+                <a:latin typeface="Calibri" pitchFamily="34" charset="0"/>
+                <a:ea typeface="Calibri" pitchFamily="34" charset="-122"/>
+                <a:cs typeface="Calibri" pitchFamily="34" charset="-120"/>
+              </a:rPr>
+              <a:t>Local repair artisans across every trade remain digitally invisible, informal, and overlooked.</a:t>
+            </a:r>
+            <a:endParaRPr lang="en-US" sz="880" dirty="0"/>
+          </a:p>
+        </p:txBody>
+      </p:sp>
+      <p:sp>
+        <p:nvSpPr>
+          <p:cNvPr id="9" name="Shape 7"/>
+          <p:cNvSpPr/>
+          <p:nvPr/>
+        </p:nvSpPr>
+        <p:spPr>
+          <a:xfrm>
+            <a:off x="4709160" y="1234440"/>
+            <a:ext cx="3886200" cy="1874520"/>
+          </a:xfrm>
+          <a:prstGeom prst="roundRect">
+            <a:avLst>
+              <a:gd name="adj" fmla="val 3902"/>
+            </a:avLst>
+          </a:prstGeom>
+          <a:solidFill>
+            <a:srgbClr val="2A0E17"/>
+          </a:solidFill>
+          <a:ln w="12700">
+            <a:solidFill>
+              <a:srgbClr val="E11D48"/>
+            </a:solidFill>
+            <a:prstDash val="solid"/>
+          </a:ln>
+        </p:spPr>
+      </p:sp>
+      <p:sp>
+        <p:nvSpPr>
+          <p:cNvPr id="10" name="Text 8"/>
+          <p:cNvSpPr/>
+          <p:nvPr/>
+        </p:nvSpPr>
+        <p:spPr>
+          <a:xfrm>
+            <a:off x="4892040" y="1353312"/>
+            <a:ext cx="3520440" cy="256032"/>
+          </a:xfrm>
+          <a:prstGeom prst="rect">
+            <a:avLst/>
+          </a:prstGeom>
+          <a:noFill/>
+          <a:ln/>
+        </p:spPr>
+        <p:txBody>
+          <a:bodyPr wrap="square" rtlCol="0" anchor="ctr"/>
+          <a:lstStyle/>
+          <a:p>
+            <a:pPr indent="0" marL="0">
+              <a:buNone/>
+            </a:pPr>
+            <a:r>
+              <a:rPr lang="en-US" sz="1200" b="1" dirty="0">
+                <a:solidFill>
+                  <a:srgbClr val="FB7185"/>
+                </a:solidFill>
+                <a:latin typeface="Calibri" pitchFamily="34" charset="0"/>
+                <a:ea typeface="Calibri" pitchFamily="34" charset="-122"/>
+                <a:cs typeface="Calibri" pitchFamily="34" charset="-120"/>
+              </a:rPr>
+              <a:t>2. The Universal Hardware Diagnostic Void</a:t>
+            </a:r>
+            <a:endParaRPr lang="en-US" sz="1200" dirty="0"/>
+          </a:p>
+        </p:txBody>
+      </p:sp>
+      <p:sp>
+        <p:nvSpPr>
+          <p:cNvPr id="11" name="Text 9"/>
+          <p:cNvSpPr/>
+          <p:nvPr/>
+        </p:nvSpPr>
+        <p:spPr>
+          <a:xfrm>
+            <a:off x="4892040" y="1645920"/>
+            <a:ext cx="3520440" cy="1325880"/>
+          </a:xfrm>
+          <a:prstGeom prst="rect">
+            <a:avLst/>
+          </a:prstGeom>
+          <a:noFill/>
+          <a:ln/>
+        </p:spPr>
+        <p:txBody>
+          <a:bodyPr wrap="square" rtlCol="0" anchor="ctr"/>
+          <a:lstStyle/>
+          <a:p>
+            <a:pPr marL="342900" indent="-342900">
+              <a:lnSpc>
+                <a:spcPct val="115000"/>
+              </a:lnSpc>
+              <a:spcAft>
+                <a:spcPts val="400"/>
+              </a:spcAft>
+              <a:buSzPct val="100000"/>
+              <a:buChar char="•"/>
+            </a:pPr>
+            <a:r>
+              <a:rPr lang="en-US" sz="880" dirty="0">
+                <a:solidFill>
+                  <a:srgbClr val="CBD5E1"/>
+                </a:solidFill>
+                <a:latin typeface="Calibri" pitchFamily="34" charset="0"/>
+                <a:ea typeface="Calibri" pitchFamily="34" charset="-122"/>
+                <a:cs typeface="Calibri" pitchFamily="34" charset="-120"/>
+              </a:rPr>
+              <a:t>Lab diagnostic equipment costs ₹50,000–₹1.5L—unaffordable for neighborhood appliance &amp; tech workshops.</a:t>
+            </a:r>
+            <a:endParaRPr lang="en-US" sz="880" dirty="0"/>
+          </a:p>
+          <a:p>
+            <a:pPr marL="342900" indent="-342900">
+              <a:lnSpc>
+                <a:spcPct val="115000"/>
+              </a:lnSpc>
+              <a:spcAft>
+                <a:spcPts val="400"/>
+              </a:spcAft>
+              <a:buSzPct val="100000"/>
+              <a:buChar char="•"/>
+            </a:pPr>
+            <a:r>
+              <a:rPr lang="en-US" sz="880" dirty="0">
+                <a:solidFill>
+                  <a:srgbClr val="CBD5E1"/>
+                </a:solidFill>
+                <a:latin typeface="Calibri" pitchFamily="34" charset="0"/>
+                <a:ea typeface="Calibri" pitchFamily="34" charset="-122"/>
+                <a:cs typeface="Calibri" pitchFamily="34" charset="-120"/>
+              </a:rPr>
+              <a:t>Standard multimeters inject 2.5V–3.0V, risking delicate micro-controllers in modern smart appliances &amp; boards.</a:t>
+            </a:r>
+            <a:endParaRPr lang="en-US" sz="880" dirty="0"/>
+          </a:p>
+          <a:p>
+            <a:pPr marL="342900" indent="-342900">
+              <a:lnSpc>
+                <a:spcPct val="115000"/>
+              </a:lnSpc>
+              <a:spcAft>
+                <a:spcPts val="400"/>
+              </a:spcAft>
+              <a:buSzPct val="100000"/>
+              <a:buChar char="•"/>
+            </a:pPr>
+            <a:r>
+              <a:rPr lang="en-US" sz="880" dirty="0">
+                <a:solidFill>
+                  <a:srgbClr val="CBD5E1"/>
+                </a:solidFill>
+                <a:latin typeface="Calibri" pitchFamily="34" charset="0"/>
+                <a:ea typeface="Calibri" pitchFamily="34" charset="-122"/>
+                <a:cs typeface="Calibri" pitchFamily="34" charset="-120"/>
+              </a:rPr>
+              <a:t>Without visual proof, mechanics guess—declaring entire appliance control boards or devices "unfixable."</a:t>
+            </a:r>
+            <a:endParaRPr lang="en-US" sz="880" dirty="0"/>
+          </a:p>
+        </p:txBody>
+      </p:sp>
+      <p:sp>
+        <p:nvSpPr>
+          <p:cNvPr id="12" name="Shape 10"/>
+          <p:cNvSpPr/>
+          <p:nvPr/>
+        </p:nvSpPr>
+        <p:spPr>
+          <a:xfrm>
+            <a:off x="548640" y="3246120"/>
+            <a:ext cx="2560320" cy="1234440"/>
+          </a:xfrm>
+          <a:prstGeom prst="roundRect">
+            <a:avLst>
+              <a:gd name="adj" fmla="val 5926"/>
             </a:avLst>
           </a:prstGeom>
           <a:solidFill>
@@ -2432,80 +2752,14 @@
       </p:sp>
       <p:sp>
         <p:nvSpPr>
-          <p:cNvPr id="7" name="Shape 5"/>
-          <p:cNvSpPr/>
-          <p:nvPr/>
-        </p:nvSpPr>
-        <p:spPr>
-          <a:xfrm>
-            <a:off x="731520" y="1371600"/>
-            <a:ext cx="1554480" cy="219456"/>
-          </a:xfrm>
-          <a:prstGeom prst="roundRect">
-            <a:avLst>
-              <a:gd name="adj" fmla="val 16667"/>
-            </a:avLst>
-          </a:prstGeom>
-          <a:solidFill>
-            <a:srgbClr val="0B253A"/>
-          </a:solidFill>
-          <a:ln w="12700">
-            <a:solidFill>
-              <a:srgbClr val="0284C7"/>
-            </a:solidFill>
-            <a:prstDash val="solid"/>
-          </a:ln>
-        </p:spPr>
-      </p:sp>
-      <p:sp>
-        <p:nvSpPr>
-          <p:cNvPr id="8" name="Text 6"/>
-          <p:cNvSpPr/>
-          <p:nvPr/>
-        </p:nvSpPr>
-        <p:spPr>
-          <a:xfrm>
-            <a:off x="731520" y="1371600"/>
-            <a:ext cx="1554480" cy="219456"/>
-          </a:xfrm>
-          <a:prstGeom prst="rect">
-            <a:avLst/>
-          </a:prstGeom>
-          <a:noFill/>
-          <a:ln/>
-        </p:spPr>
-        <p:txBody>
-          <a:bodyPr wrap="square" rtlCol="0" anchor="ctr"/>
-          <a:lstStyle/>
-          <a:p>
-            <a:pPr algn="ctr" indent="0" marL="0">
-              <a:buNone/>
-            </a:pPr>
-            <a:r>
-              <a:rPr lang="en-US" sz="800" b="1" dirty="0">
-                <a:solidFill>
-                  <a:srgbClr val="38BDF8"/>
-                </a:solidFill>
-                <a:latin typeface="Calibri" pitchFamily="34" charset="0"/>
-                <a:ea typeface="Calibri" pitchFamily="34" charset="-122"/>
-                <a:cs typeface="Calibri" pitchFamily="34" charset="-120"/>
-              </a:rPr>
-              <a:t>PILLAR 1: WEB PLATFORM</a:t>
-            </a:r>
-            <a:endParaRPr lang="en-US" sz="800" dirty="0"/>
-          </a:p>
-        </p:txBody>
-      </p:sp>
-      <p:sp>
-        <p:nvSpPr>
-          <p:cNvPr id="9" name="Text 7"/>
-          <p:cNvSpPr/>
-          <p:nvPr/>
-        </p:nvSpPr>
-        <p:spPr>
-          <a:xfrm>
-            <a:off x="731520" y="1664208"/>
-            <a:ext cx="3520440" cy="256032"/>
+          <p:cNvPr id="13" name="Text 11"/>
+          <p:cNvSpPr/>
+          <p:nvPr/>
+        </p:nvSpPr>
+        <p:spPr>
+          <a:xfrm>
+            <a:off x="685800" y="3337560"/>
+            <a:ext cx="2286000" cy="292608"/>
           </a:xfrm>
           <a:prstGeom prst="rect">
             <a:avLst/>
@@ -2521,7 +2775,46 @@
               <a:buNone/>
             </a:pPr>
             <a:r>
-              <a:rPr lang="en-US" sz="1300" b="1" dirty="0">
+              <a:rPr lang="en-US" sz="1600" b="1" dirty="0">
+                <a:solidFill>
+                  <a:srgbClr val="FB7185"/>
+                </a:solidFill>
+                <a:latin typeface="Calibri" pitchFamily="34" charset="0"/>
+                <a:ea typeface="Calibri" pitchFamily="34" charset="-122"/>
+                <a:cs typeface="Calibri" pitchFamily="34" charset="-120"/>
+              </a:rPr>
+              <a:t>₹1.2L Cr</a:t>
+            </a:r>
+            <a:endParaRPr lang="en-US" sz="1600" dirty="0"/>
+          </a:p>
+        </p:txBody>
+      </p:sp>
+      <p:sp>
+        <p:nvSpPr>
+          <p:cNvPr id="14" name="Text 12"/>
+          <p:cNvSpPr/>
+          <p:nvPr/>
+        </p:nvSpPr>
+        <p:spPr>
+          <a:xfrm>
+            <a:off x="685800" y="3639312"/>
+            <a:ext cx="2286000" cy="201168"/>
+          </a:xfrm>
+          <a:prstGeom prst="rect">
+            <a:avLst/>
+          </a:prstGeom>
+          <a:noFill/>
+          <a:ln/>
+        </p:spPr>
+        <p:txBody>
+          <a:bodyPr wrap="square" rtlCol="0" anchor="ctr"/>
+          <a:lstStyle/>
+          <a:p>
+            <a:pPr indent="0" marL="0">
+              <a:buNone/>
+            </a:pPr>
+            <a:r>
+              <a:rPr lang="en-US" sz="900" b="1" dirty="0">
                 <a:solidFill>
                   <a:srgbClr val="FFFFFF"/>
                 </a:solidFill>
@@ -2529,144 +2822,68 @@
                 <a:ea typeface="Calibri" pitchFamily="34" charset="-122"/>
                 <a:cs typeface="Calibri" pitchFamily="34" charset="-120"/>
               </a:rPr>
-              <a:t>FixGrid Digital Trust Web Network</a:t>
-            </a:r>
-            <a:endParaRPr lang="en-US" sz="1300" dirty="0"/>
-          </a:p>
-        </p:txBody>
-      </p:sp>
-      <p:sp>
-        <p:nvSpPr>
-          <p:cNvPr id="10" name="Text 8"/>
-          <p:cNvSpPr/>
-          <p:nvPr/>
-        </p:nvSpPr>
-        <p:spPr>
-          <a:xfrm>
-            <a:off x="731520" y="1965960"/>
-            <a:ext cx="3520440" cy="1554480"/>
-          </a:xfrm>
-          <a:prstGeom prst="rect">
-            <a:avLst/>
-          </a:prstGeom>
-          <a:noFill/>
-          <a:ln/>
-        </p:spPr>
-        <p:txBody>
-          <a:bodyPr wrap="square" rtlCol="0" anchor="ctr"/>
-          <a:lstStyle/>
-          <a:p>
-            <a:pPr marL="342900" indent="-342900">
+              <a:t>THE LOST VALUE</a:t>
+            </a:r>
+            <a:endParaRPr lang="en-US" sz="900" dirty="0"/>
+          </a:p>
+        </p:txBody>
+      </p:sp>
+      <p:sp>
+        <p:nvSpPr>
+          <p:cNvPr id="15" name="Text 13"/>
+          <p:cNvSpPr/>
+          <p:nvPr/>
+        </p:nvSpPr>
+        <p:spPr>
+          <a:xfrm>
+            <a:off x="685800" y="3858768"/>
+            <a:ext cx="2286000" cy="548640"/>
+          </a:xfrm>
+          <a:prstGeom prst="rect">
+            <a:avLst/>
+          </a:prstGeom>
+          <a:noFill/>
+          <a:ln/>
+        </p:spPr>
+        <p:txBody>
+          <a:bodyPr wrap="square" rtlCol="0" anchor="ctr"/>
+          <a:lstStyle/>
+          <a:p>
+            <a:pPr indent="0" marL="0">
               <a:lnSpc>
                 <a:spcPct val="115000"/>
               </a:lnSpc>
-              <a:spcAft>
-                <a:spcPts val="400"/>
-              </a:spcAft>
-              <a:buSzPct val="100000"/>
-              <a:buChar char="•"/>
-            </a:pPr>
-            <a:r>
-              <a:rPr lang="en-US" sz="920" dirty="0">
-                <a:solidFill>
-                  <a:srgbClr val="CBD5E1"/>
-                </a:solidFill>
-                <a:latin typeface="Calibri" pitchFamily="34" charset="0"/>
-                <a:ea typeface="Calibri" pitchFamily="34" charset="-122"/>
-                <a:cs typeface="Calibri" pitchFamily="34" charset="-120"/>
-              </a:rPr>
-              <a:t>Live Web Platform: Hyper-local directory with real-time shop hours and 21 repair categories.</a:t>
-            </a:r>
-            <a:endParaRPr lang="en-US" sz="920" dirty="0"/>
-          </a:p>
-          <a:p>
-            <a:pPr marL="342900" indent="-342900">
-              <a:lnSpc>
-                <a:spcPct val="115000"/>
-              </a:lnSpc>
-              <a:spcAft>
-                <a:spcPts val="400"/>
-              </a:spcAft>
-              <a:buSzPct val="100000"/>
-              <a:buChar char="•"/>
-            </a:pPr>
-            <a:r>
-              <a:rPr lang="en-US" sz="920" dirty="0">
-                <a:solidFill>
-                  <a:srgbClr val="CBD5E1"/>
-                </a:solidFill>
-                <a:latin typeface="Calibri" pitchFamily="34" charset="0"/>
-                <a:ea typeface="Calibri" pitchFamily="34" charset="-122"/>
-                <a:cs typeface="Calibri" pitchFamily="34" charset="-120"/>
-              </a:rPr>
-              <a:t>Smart Escrow: Funds held securely and released only after verified customer satisfaction.</a:t>
-            </a:r>
-            <a:endParaRPr lang="en-US" sz="920" dirty="0"/>
-          </a:p>
-          <a:p>
-            <a:pPr marL="342900" indent="-342900">
-              <a:lnSpc>
-                <a:spcPct val="115000"/>
-              </a:lnSpc>
-              <a:spcAft>
-                <a:spcPts val="400"/>
-              </a:spcAft>
-              <a:buSzPct val="100000"/>
-              <a:buChar char="•"/>
-            </a:pPr>
-            <a:r>
-              <a:rPr lang="en-US" sz="920" dirty="0">
-                <a:solidFill>
-                  <a:srgbClr val="CBD5E1"/>
-                </a:solidFill>
-                <a:latin typeface="Calibri" pitchFamily="34" charset="0"/>
-                <a:ea typeface="Calibri" pitchFamily="34" charset="-122"/>
-                <a:cs typeface="Calibri" pitchFamily="34" charset="-120"/>
-              </a:rPr>
-              <a:t>Platform-Backed Warranty: 5-day standard warranty + digital shopkeeper warranty records.</a:t>
-            </a:r>
-            <a:endParaRPr lang="en-US" sz="920" dirty="0"/>
-          </a:p>
-          <a:p>
-            <a:pPr marL="342900" indent="-342900">
-              <a:lnSpc>
-                <a:spcPct val="115000"/>
-              </a:lnSpc>
-              <a:spcAft>
-                <a:spcPts val="400"/>
-              </a:spcAft>
-              <a:buSzPct val="100000"/>
-              <a:buChar char="•"/>
-            </a:pPr>
-            <a:r>
-              <a:rPr lang="en-US" sz="920" dirty="0">
-                <a:solidFill>
-                  <a:srgbClr val="CBD5E1"/>
-                </a:solidFill>
-                <a:latin typeface="Calibri" pitchFamily="34" charset="0"/>
-                <a:ea typeface="Calibri" pitchFamily="34" charset="-122"/>
-                <a:cs typeface="Calibri" pitchFamily="34" charset="-120"/>
-              </a:rPr>
-              <a:t>Artisan Cashback: 5% completed-bill rebate rewarding honest local craftsmanship.</a:t>
-            </a:r>
-            <a:endParaRPr lang="en-US" sz="920" dirty="0"/>
-          </a:p>
-        </p:txBody>
-      </p:sp>
-      <p:sp>
-        <p:nvSpPr>
-          <p:cNvPr id="11" name="Shape 9"/>
-          <p:cNvSpPr/>
-          <p:nvPr/>
-        </p:nvSpPr>
-        <p:spPr>
-          <a:xfrm>
-            <a:off x="4709160" y="1234440"/>
-            <a:ext cx="3886200" cy="2423160"/>
+              <a:buNone/>
+            </a:pPr>
+            <a:r>
+              <a:rPr lang="en-US" sz="850" dirty="0">
+                <a:solidFill>
+                  <a:srgbClr val="94A3B8"/>
+                </a:solidFill>
+                <a:latin typeface="Calibri" pitchFamily="34" charset="0"/>
+                <a:ea typeface="Calibri" pitchFamily="34" charset="-122"/>
+                <a:cs typeface="Calibri" pitchFamily="34" charset="-120"/>
+              </a:rPr>
+              <a:t>Consumers waste billions replacing appliances &amp; devices when an artisan 500m away could repair it.</a:t>
+            </a:r>
+            <a:endParaRPr lang="en-US" sz="850" dirty="0"/>
+          </a:p>
+        </p:txBody>
+      </p:sp>
+      <p:sp>
+        <p:nvSpPr>
+          <p:cNvPr id="16" name="Shape 14"/>
+          <p:cNvSpPr/>
+          <p:nvPr/>
+        </p:nvSpPr>
+        <p:spPr>
+          <a:xfrm>
+            <a:off x="3291840" y="3246120"/>
+            <a:ext cx="2560320" cy="1234440"/>
           </a:xfrm>
           <a:prstGeom prst="roundRect">
             <a:avLst>
-              <a:gd name="adj" fmla="val 3019"/>
+              <a:gd name="adj" fmla="val 5926"/>
             </a:avLst>
           </a:prstGeom>
           <a:solidFill>
@@ -2682,26 +2899,146 @@
       </p:sp>
       <p:sp>
         <p:nvSpPr>
-          <p:cNvPr id="12" name="Shape 10"/>
-          <p:cNvSpPr/>
-          <p:nvPr/>
-        </p:nvSpPr>
-        <p:spPr>
-          <a:xfrm>
-            <a:off x="4892040" y="1371600"/>
-            <a:ext cx="1554480" cy="219456"/>
+          <p:cNvPr id="17" name="Text 15"/>
+          <p:cNvSpPr/>
+          <p:nvPr/>
+        </p:nvSpPr>
+        <p:spPr>
+          <a:xfrm>
+            <a:off x="3429000" y="3337560"/>
+            <a:ext cx="2286000" cy="292608"/>
+          </a:xfrm>
+          <a:prstGeom prst="rect">
+            <a:avLst/>
+          </a:prstGeom>
+          <a:noFill/>
+          <a:ln/>
+        </p:spPr>
+        <p:txBody>
+          <a:bodyPr wrap="square" rtlCol="0" anchor="ctr"/>
+          <a:lstStyle/>
+          <a:p>
+            <a:pPr indent="0" marL="0">
+              <a:buNone/>
+            </a:pPr>
+            <a:r>
+              <a:rPr lang="en-US" sz="1600" b="1" dirty="0">
+                <a:solidFill>
+                  <a:srgbClr val="FBBF24"/>
+                </a:solidFill>
+                <a:latin typeface="Calibri" pitchFamily="34" charset="0"/>
+                <a:ea typeface="Calibri" pitchFamily="34" charset="-122"/>
+                <a:cs typeface="Calibri" pitchFamily="34" charset="-120"/>
+              </a:rPr>
+              <a:t>85%+</a:t>
+            </a:r>
+            <a:endParaRPr lang="en-US" sz="1600" dirty="0"/>
+          </a:p>
+        </p:txBody>
+      </p:sp>
+      <p:sp>
+        <p:nvSpPr>
+          <p:cNvPr id="18" name="Text 16"/>
+          <p:cNvSpPr/>
+          <p:nvPr/>
+        </p:nvSpPr>
+        <p:spPr>
+          <a:xfrm>
+            <a:off x="3429000" y="3639312"/>
+            <a:ext cx="2286000" cy="201168"/>
+          </a:xfrm>
+          <a:prstGeom prst="rect">
+            <a:avLst/>
+          </a:prstGeom>
+          <a:noFill/>
+          <a:ln/>
+        </p:spPr>
+        <p:txBody>
+          <a:bodyPr wrap="square" rtlCol="0" anchor="ctr"/>
+          <a:lstStyle/>
+          <a:p>
+            <a:pPr indent="0" marL="0">
+              <a:buNone/>
+            </a:pPr>
+            <a:r>
+              <a:rPr lang="en-US" sz="900" b="1" dirty="0">
+                <a:solidFill>
+                  <a:srgbClr val="FFFFFF"/>
+                </a:solidFill>
+                <a:latin typeface="Calibri" pitchFamily="34" charset="0"/>
+                <a:ea typeface="Calibri" pitchFamily="34" charset="-122"/>
+                <a:cs typeface="Calibri" pitchFamily="34" charset="-120"/>
+              </a:rPr>
+              <a:t>SKILLED HEROES OVERLOOKED</a:t>
+            </a:r>
+            <a:endParaRPr lang="en-US" sz="900" dirty="0"/>
+          </a:p>
+        </p:txBody>
+      </p:sp>
+      <p:sp>
+        <p:nvSpPr>
+          <p:cNvPr id="19" name="Text 17"/>
+          <p:cNvSpPr/>
+          <p:nvPr/>
+        </p:nvSpPr>
+        <p:spPr>
+          <a:xfrm>
+            <a:off x="3429000" y="3858768"/>
+            <a:ext cx="2286000" cy="548640"/>
+          </a:xfrm>
+          <a:prstGeom prst="rect">
+            <a:avLst/>
+          </a:prstGeom>
+          <a:noFill/>
+          <a:ln/>
+        </p:spPr>
+        <p:txBody>
+          <a:bodyPr wrap="square" rtlCol="0" anchor="ctr"/>
+          <a:lstStyle/>
+          <a:p>
+            <a:pPr indent="0" marL="0">
+              <a:lnSpc>
+                <a:spcPct val="115000"/>
+              </a:lnSpc>
+              <a:buNone/>
+            </a:pPr>
+            <a:r>
+              <a:rPr lang="en-US" sz="850" dirty="0">
+                <a:solidFill>
+                  <a:srgbClr val="94A3B8"/>
+                </a:solidFill>
+                <a:latin typeface="Calibri" pitchFamily="34" charset="0"/>
+                <a:ea typeface="Calibri" pitchFamily="34" charset="-122"/>
+                <a:cs typeface="Calibri" pitchFamily="34" charset="-120"/>
+              </a:rPr>
+              <a:t>Informal repair mechanics across 21+ categories lack digital tools and are trapped in unverified guesswork.</a:t>
+            </a:r>
+            <a:endParaRPr lang="en-US" sz="850" dirty="0"/>
+          </a:p>
+        </p:txBody>
+      </p:sp>
+      <p:sp>
+        <p:nvSpPr>
+          <p:cNvPr id="20" name="Shape 18"/>
+          <p:cNvSpPr/>
+          <p:nvPr/>
+        </p:nvSpPr>
+        <p:spPr>
+          <a:xfrm>
+            <a:off x="6035040" y="3246120"/>
+            <a:ext cx="2560320" cy="1234440"/>
           </a:xfrm>
           <a:prstGeom prst="roundRect">
             <a:avLst>
-              <a:gd name="adj" fmla="val 16667"/>
+              <a:gd name="adj" fmla="val 5926"/>
             </a:avLst>
           </a:prstGeom>
           <a:solidFill>
-            <a:srgbClr val="07291E"/>
+            <a:srgbClr val="111827"/>
           </a:solidFill>
           <a:ln w="12700">
             <a:solidFill>
-              <a:srgbClr val="059669"/>
+              <a:srgbClr val="1F293D"/>
             </a:solidFill>
             <a:prstDash val="solid"/>
           </a:ln>
@@ -2709,53 +3046,14 @@
       </p:sp>
       <p:sp>
         <p:nvSpPr>
-          <p:cNvPr id="13" name="Text 11"/>
-          <p:cNvSpPr/>
-          <p:nvPr/>
-        </p:nvSpPr>
-        <p:spPr>
-          <a:xfrm>
-            <a:off x="4892040" y="1371600"/>
-            <a:ext cx="1554480" cy="219456"/>
-          </a:xfrm>
-          <a:prstGeom prst="rect">
-            <a:avLst/>
-          </a:prstGeom>
-          <a:noFill/>
-          <a:ln/>
-        </p:spPr>
-        <p:txBody>
-          <a:bodyPr wrap="square" rtlCol="0" anchor="ctr"/>
-          <a:lstStyle/>
-          <a:p>
-            <a:pPr algn="ctr" indent="0" marL="0">
-              <a:buNone/>
-            </a:pPr>
-            <a:r>
-              <a:rPr lang="en-US" sz="800" b="1" dirty="0">
-                <a:solidFill>
-                  <a:srgbClr val="34D399"/>
-                </a:solidFill>
-                <a:latin typeface="Calibri" pitchFamily="34" charset="0"/>
-                <a:ea typeface="Calibri" pitchFamily="34" charset="-122"/>
-                <a:cs typeface="Calibri" pitchFamily="34" charset="-120"/>
-              </a:rPr>
-              <a:t>PILLAR 2: HARDWARE</a:t>
-            </a:r>
-            <a:endParaRPr lang="en-US" sz="800" dirty="0"/>
-          </a:p>
-        </p:txBody>
-      </p:sp>
-      <p:sp>
-        <p:nvSpPr>
-          <p:cNvPr id="14" name="Text 12"/>
-          <p:cNvSpPr/>
-          <p:nvPr/>
-        </p:nvSpPr>
-        <p:spPr>
-          <a:xfrm>
-            <a:off x="4892040" y="1664208"/>
-            <a:ext cx="3520440" cy="256032"/>
+          <p:cNvPr id="21" name="Text 19"/>
+          <p:cNvSpPr/>
+          <p:nvPr/>
+        </p:nvSpPr>
+        <p:spPr>
+          <a:xfrm>
+            <a:off x="6172200" y="3337560"/>
+            <a:ext cx="2286000" cy="292608"/>
           </a:xfrm>
           <a:prstGeom prst="rect">
             <a:avLst/>
@@ -2771,7 +3069,46 @@
               <a:buNone/>
             </a:pPr>
             <a:r>
-              <a:rPr lang="en-US" sz="1300" b="1" dirty="0">
+              <a:rPr lang="en-US" sz="1600" b="1" dirty="0">
+                <a:solidFill>
+                  <a:srgbClr val="A78BFA"/>
+                </a:solidFill>
+                <a:latin typeface="Calibri" pitchFamily="34" charset="0"/>
+                <a:ea typeface="Calibri" pitchFamily="34" charset="-122"/>
+                <a:cs typeface="Calibri" pitchFamily="34" charset="-120"/>
+              </a:rPr>
+              <a:t>Millions</a:t>
+            </a:r>
+            <a:endParaRPr lang="en-US" sz="1600" dirty="0"/>
+          </a:p>
+        </p:txBody>
+      </p:sp>
+      <p:sp>
+        <p:nvSpPr>
+          <p:cNvPr id="22" name="Text 20"/>
+          <p:cNvSpPr/>
+          <p:nvPr/>
+        </p:nvSpPr>
+        <p:spPr>
+          <a:xfrm>
+            <a:off x="6172200" y="3639312"/>
+            <a:ext cx="2286000" cy="201168"/>
+          </a:xfrm>
+          <a:prstGeom prst="rect">
+            <a:avLst/>
+          </a:prstGeom>
+          <a:noFill/>
+          <a:ln/>
+        </p:spPr>
+        <p:txBody>
+          <a:bodyPr wrap="square" rtlCol="0" anchor="ctr"/>
+          <a:lstStyle/>
+          <a:p>
+            <a:pPr indent="0" marL="0">
+              <a:buNone/>
+            </a:pPr>
+            <a:r>
+              <a:rPr lang="en-US" sz="900" b="1" dirty="0">
                 <a:solidFill>
                   <a:srgbClr val="FFFFFF"/>
                 </a:solidFill>
@@ -2779,222 +3116,41 @@
                 <a:ea typeface="Calibri" pitchFamily="34" charset="-122"/>
                 <a:cs typeface="Calibri" pitchFamily="34" charset="-120"/>
               </a:rPr>
-              <a:t>SafeProbe™ Smart Diagnostic Wand</a:t>
-            </a:r>
-            <a:endParaRPr lang="en-US" sz="1300" dirty="0"/>
-          </a:p>
-        </p:txBody>
-      </p:sp>
-      <p:sp>
-        <p:nvSpPr>
-          <p:cNvPr id="15" name="Text 13"/>
-          <p:cNvSpPr/>
-          <p:nvPr/>
-        </p:nvSpPr>
-        <p:spPr>
-          <a:xfrm>
-            <a:off x="4892040" y="1965960"/>
-            <a:ext cx="3520440" cy="1554480"/>
-          </a:xfrm>
-          <a:prstGeom prst="rect">
-            <a:avLst/>
-          </a:prstGeom>
-          <a:noFill/>
-          <a:ln/>
-        </p:spPr>
-        <p:txBody>
-          <a:bodyPr wrap="square" rtlCol="0" anchor="ctr"/>
-          <a:lstStyle/>
-          <a:p>
-            <a:pPr marL="342900" indent="-342900">
+              <a:t>E-WASTE CATASTROPHE</a:t>
+            </a:r>
+            <a:endParaRPr lang="en-US" sz="900" dirty="0"/>
+          </a:p>
+        </p:txBody>
+      </p:sp>
+      <p:sp>
+        <p:nvSpPr>
+          <p:cNvPr id="23" name="Text 21"/>
+          <p:cNvSpPr/>
+          <p:nvPr/>
+        </p:nvSpPr>
+        <p:spPr>
+          <a:xfrm>
+            <a:off x="6172200" y="3858768"/>
+            <a:ext cx="2286000" cy="548640"/>
+          </a:xfrm>
+          <a:prstGeom prst="rect">
+            <a:avLst/>
+          </a:prstGeom>
+          <a:noFill/>
+          <a:ln/>
+        </p:spPr>
+        <p:txBody>
+          <a:bodyPr wrap="square" rtlCol="0" anchor="ctr"/>
+          <a:lstStyle/>
+          <a:p>
+            <a:pPr indent="0" marL="0">
               <a:lnSpc>
                 <a:spcPct val="115000"/>
               </a:lnSpc>
-              <a:spcAft>
-                <a:spcPts val="400"/>
-              </a:spcAft>
-              <a:buSzPct val="100000"/>
-              <a:buChar char="•"/>
-            </a:pPr>
-            <a:r>
-              <a:rPr lang="en-US" sz="920" dirty="0">
-                <a:solidFill>
-                  <a:srgbClr val="CBD5E1"/>
-                </a:solidFill>
-                <a:latin typeface="Calibri" pitchFamily="34" charset="0"/>
-                <a:ea typeface="Calibri" pitchFamily="34" charset="-122"/>
-                <a:cs typeface="Calibri" pitchFamily="34" charset="-120"/>
-              </a:rPr>
-              <a:t>Frugal Tool BOM: Built for under ₹1,200 ($14), replacing ₹1.5L lab oscilloscopes.</a:t>
-            </a:r>
-            <a:endParaRPr lang="en-US" sz="920" dirty="0"/>
-          </a:p>
-          <a:p>
-            <a:pPr marL="342900" indent="-342900">
-              <a:lnSpc>
-                <a:spcPct val="115000"/>
-              </a:lnSpc>
-              <a:spcAft>
-                <a:spcPts val="400"/>
-              </a:spcAft>
-              <a:buSzPct val="100000"/>
-              <a:buChar char="•"/>
-            </a:pPr>
-            <a:r>
-              <a:rPr lang="en-US" sz="920" dirty="0">
-                <a:solidFill>
-                  <a:srgbClr val="CBD5E1"/>
-                </a:solidFill>
-                <a:latin typeface="Calibri" pitchFamily="34" charset="0"/>
-                <a:ea typeface="Calibri" pitchFamily="34" charset="-122"/>
-                <a:cs typeface="Calibri" pitchFamily="34" charset="-120"/>
-              </a:rPr>
-              <a:t>Instant Micro-Touch Sensing: Precision needle probe tests trace impedance with audio chirp &amp; OLED color.</a:t>
-            </a:r>
-            <a:endParaRPr lang="en-US" sz="920" dirty="0"/>
-          </a:p>
-          <a:p>
-            <a:pPr marL="342900" indent="-342900">
-              <a:lnSpc>
-                <a:spcPct val="115000"/>
-              </a:lnSpc>
-              <a:spcAft>
-                <a:spcPts val="400"/>
-              </a:spcAft>
-              <a:buSzPct val="100000"/>
-              <a:buChar char="•"/>
-            </a:pPr>
-            <a:r>
-              <a:rPr lang="en-US" sz="920" dirty="0">
-                <a:solidFill>
-                  <a:srgbClr val="CBD5E1"/>
-                </a:solidFill>
-                <a:latin typeface="Calibri" pitchFamily="34" charset="0"/>
-                <a:ea typeface="Calibri" pitchFamily="34" charset="-122"/>
-                <a:cs typeface="Calibri" pitchFamily="34" charset="-120"/>
-              </a:rPr>
-              <a:t>5MP Macro Camera Microscope: Snaps magnified photo proof sent straight to customer’s phone.</a:t>
-            </a:r>
-            <a:endParaRPr lang="en-US" sz="920" dirty="0"/>
-          </a:p>
-          <a:p>
-            <a:pPr marL="342900" indent="-342900">
-              <a:lnSpc>
-                <a:spcPct val="115000"/>
-              </a:lnSpc>
-              <a:spcAft>
-                <a:spcPts val="400"/>
-              </a:spcAft>
-              <a:buSzPct val="100000"/>
-              <a:buChar char="•"/>
-            </a:pPr>
-            <a:r>
-              <a:rPr lang="en-US" sz="920" dirty="0">
-                <a:solidFill>
-                  <a:srgbClr val="CBD5E1"/>
-                </a:solidFill>
-                <a:latin typeface="Calibri" pitchFamily="34" charset="0"/>
-                <a:ea typeface="Calibri" pitchFamily="34" charset="-122"/>
-                <a:cs typeface="Calibri" pitchFamily="34" charset="-120"/>
-              </a:rPr>
-              <a:t>Dual-Loop QR Passport: Issues physical tamper-evident QR void seals linked to cloud warranty.</a:t>
-            </a:r>
-            <a:endParaRPr lang="en-US" sz="920" dirty="0"/>
-          </a:p>
-        </p:txBody>
-      </p:sp>
-      <p:sp>
-        <p:nvSpPr>
-          <p:cNvPr id="16" name="Shape 14"/>
-          <p:cNvSpPr/>
-          <p:nvPr/>
-        </p:nvSpPr>
-        <p:spPr>
-          <a:xfrm>
-            <a:off x="548640" y="3794760"/>
-            <a:ext cx="1920240" cy="658368"/>
-          </a:xfrm>
-          <a:prstGeom prst="roundRect">
-            <a:avLst>
-              <a:gd name="adj" fmla="val 11111"/>
-            </a:avLst>
-          </a:prstGeom>
-          <a:solidFill>
-            <a:srgbClr val="0B253A"/>
-          </a:solidFill>
-          <a:ln w="12700">
-            <a:solidFill>
-              <a:srgbClr val="0284C7"/>
-            </a:solidFill>
-            <a:prstDash val="solid"/>
-          </a:ln>
-        </p:spPr>
-      </p:sp>
-      <p:sp>
-        <p:nvSpPr>
-          <p:cNvPr id="17" name="Text 15"/>
-          <p:cNvSpPr/>
-          <p:nvPr/>
-        </p:nvSpPr>
-        <p:spPr>
-          <a:xfrm>
-            <a:off x="548640" y="3840480"/>
-            <a:ext cx="1920240" cy="292608"/>
-          </a:xfrm>
-          <a:prstGeom prst="rect">
-            <a:avLst/>
-          </a:prstGeom>
-          <a:noFill/>
-          <a:ln/>
-        </p:spPr>
-        <p:txBody>
-          <a:bodyPr wrap="square" rtlCol="0" anchor="ctr"/>
-          <a:lstStyle/>
-          <a:p>
-            <a:pPr algn="ctr" indent="0" marL="0">
-              <a:buNone/>
-            </a:pPr>
-            <a:r>
-              <a:rPr lang="en-US" sz="1300" b="1" dirty="0">
-                <a:solidFill>
-                  <a:srgbClr val="38BDF8"/>
-                </a:solidFill>
-                <a:latin typeface="Calibri" pitchFamily="34" charset="0"/>
-                <a:ea typeface="Calibri" pitchFamily="34" charset="-122"/>
-                <a:cs typeface="Calibri" pitchFamily="34" charset="-120"/>
-              </a:rPr>
-              <a:t>www.vytron.me</a:t>
-            </a:r>
-            <a:endParaRPr lang="en-US" sz="1300" dirty="0"/>
-          </a:p>
-        </p:txBody>
-      </p:sp>
-      <p:sp>
-        <p:nvSpPr>
-          <p:cNvPr id="18" name="Text 16"/>
-          <p:cNvSpPr/>
-          <p:nvPr/>
-        </p:nvSpPr>
-        <p:spPr>
-          <a:xfrm>
-            <a:off x="548640" y="4151376"/>
-            <a:ext cx="1920240" cy="228600"/>
-          </a:xfrm>
-          <a:prstGeom prst="rect">
-            <a:avLst/>
-          </a:prstGeom>
-          <a:noFill/>
-          <a:ln/>
-        </p:spPr>
-        <p:txBody>
-          <a:bodyPr wrap="square" rtlCol="0" anchor="ctr"/>
-          <a:lstStyle/>
-          <a:p>
-            <a:pPr algn="ctr" indent="0" marL="0">
-              <a:buNone/>
-            </a:pPr>
-            <a:r>
-              <a:rPr lang="en-US" sz="800" b="1" dirty="0">
+              <a:buNone/>
+            </a:pPr>
+            <a:r>
+              <a:rPr lang="en-US" sz="850" dirty="0">
                 <a:solidFill>
                   <a:srgbClr val="94A3B8"/>
                 </a:solidFill>
@@ -3002,330 +3158,15 @@
                 <a:ea typeface="Calibri" pitchFamily="34" charset="-122"/>
                 <a:cs typeface="Calibri" pitchFamily="34" charset="-120"/>
               </a:rPr>
-              <a:t>Live Web Platform</a:t>
-            </a:r>
-            <a:endParaRPr lang="en-US" sz="800" dirty="0"/>
-          </a:p>
-        </p:txBody>
-      </p:sp>
-      <p:sp>
-        <p:nvSpPr>
-          <p:cNvPr id="19" name="Shape 17"/>
-          <p:cNvSpPr/>
-          <p:nvPr/>
-        </p:nvSpPr>
-        <p:spPr>
-          <a:xfrm>
-            <a:off x="2651760" y="3794760"/>
-            <a:ext cx="1920240" cy="658368"/>
-          </a:xfrm>
-          <a:prstGeom prst="roundRect">
-            <a:avLst>
-              <a:gd name="adj" fmla="val 11111"/>
-            </a:avLst>
-          </a:prstGeom>
-          <a:solidFill>
-            <a:srgbClr val="07291E"/>
-          </a:solidFill>
-          <a:ln w="12700">
-            <a:solidFill>
-              <a:srgbClr val="059669"/>
-            </a:solidFill>
-            <a:prstDash val="solid"/>
-          </a:ln>
-        </p:spPr>
-      </p:sp>
-      <p:sp>
-        <p:nvSpPr>
-          <p:cNvPr id="20" name="Text 18"/>
-          <p:cNvSpPr/>
-          <p:nvPr/>
-        </p:nvSpPr>
-        <p:spPr>
-          <a:xfrm>
-            <a:off x="2651760" y="3840480"/>
-            <a:ext cx="1920240" cy="292608"/>
-          </a:xfrm>
-          <a:prstGeom prst="rect">
-            <a:avLst/>
-          </a:prstGeom>
-          <a:noFill/>
-          <a:ln/>
-        </p:spPr>
-        <p:txBody>
-          <a:bodyPr wrap="square" rtlCol="0" anchor="ctr"/>
-          <a:lstStyle/>
-          <a:p>
-            <a:pPr algn="ctr" indent="0" marL="0">
-              <a:buNone/>
-            </a:pPr>
-            <a:r>
-              <a:rPr lang="en-US" sz="1300" b="1" dirty="0">
-                <a:solidFill>
-                  <a:srgbClr val="34D399"/>
-                </a:solidFill>
-                <a:latin typeface="Calibri" pitchFamily="34" charset="0"/>
-                <a:ea typeface="Calibri" pitchFamily="34" charset="-122"/>
-                <a:cs typeface="Calibri" pitchFamily="34" charset="-120"/>
-              </a:rPr>
-              <a:t>₹1,200 BOM</a:t>
-            </a:r>
-            <a:endParaRPr lang="en-US" sz="1300" dirty="0"/>
-          </a:p>
-        </p:txBody>
-      </p:sp>
-      <p:sp>
-        <p:nvSpPr>
-          <p:cNvPr id="21" name="Text 19"/>
-          <p:cNvSpPr/>
-          <p:nvPr/>
-        </p:nvSpPr>
-        <p:spPr>
-          <a:xfrm>
-            <a:off x="2651760" y="4151376"/>
-            <a:ext cx="1920240" cy="228600"/>
-          </a:xfrm>
-          <a:prstGeom prst="rect">
-            <a:avLst/>
-          </a:prstGeom>
-          <a:noFill/>
-          <a:ln/>
-        </p:spPr>
-        <p:txBody>
-          <a:bodyPr wrap="square" rtlCol="0" anchor="ctr"/>
-          <a:lstStyle/>
-          <a:p>
-            <a:pPr algn="ctr" indent="0" marL="0">
-              <a:buNone/>
-            </a:pPr>
-            <a:r>
-              <a:rPr lang="en-US" sz="800" b="1" dirty="0">
-                <a:solidFill>
-                  <a:srgbClr val="94A3B8"/>
-                </a:solidFill>
-                <a:latin typeface="Calibri" pitchFamily="34" charset="0"/>
-                <a:ea typeface="Calibri" pitchFamily="34" charset="-122"/>
-                <a:cs typeface="Calibri" pitchFamily="34" charset="-120"/>
-              </a:rPr>
-              <a:t>SafeProbe Hardware</a:t>
-            </a:r>
-            <a:endParaRPr lang="en-US" sz="800" dirty="0"/>
-          </a:p>
-        </p:txBody>
-      </p:sp>
-      <p:sp>
-        <p:nvSpPr>
-          <p:cNvPr id="22" name="Shape 20"/>
-          <p:cNvSpPr/>
-          <p:nvPr/>
-        </p:nvSpPr>
-        <p:spPr>
-          <a:xfrm>
-            <a:off x="4754880" y="3794760"/>
-            <a:ext cx="1828800" cy="658368"/>
-          </a:xfrm>
-          <a:prstGeom prst="roundRect">
-            <a:avLst>
-              <a:gd name="adj" fmla="val 11111"/>
-            </a:avLst>
-          </a:prstGeom>
-          <a:solidFill>
-            <a:srgbClr val="23153C"/>
-          </a:solidFill>
-          <a:ln w="12700">
-            <a:solidFill>
-              <a:srgbClr val="7C3AED"/>
-            </a:solidFill>
-            <a:prstDash val="solid"/>
-          </a:ln>
-        </p:spPr>
-      </p:sp>
-      <p:sp>
-        <p:nvSpPr>
-          <p:cNvPr id="23" name="Text 21"/>
-          <p:cNvSpPr/>
-          <p:nvPr/>
-        </p:nvSpPr>
-        <p:spPr>
-          <a:xfrm>
-            <a:off x="4754880" y="3840480"/>
-            <a:ext cx="1828800" cy="292608"/>
-          </a:xfrm>
-          <a:prstGeom prst="rect">
-            <a:avLst/>
-          </a:prstGeom>
-          <a:noFill/>
-          <a:ln/>
-        </p:spPr>
-        <p:txBody>
-          <a:bodyPr wrap="square" rtlCol="0" anchor="ctr"/>
-          <a:lstStyle/>
-          <a:p>
-            <a:pPr algn="ctr" indent="0" marL="0">
-              <a:buNone/>
-            </a:pPr>
-            <a:r>
-              <a:rPr lang="en-US" sz="1300" b="1" dirty="0">
-                <a:solidFill>
-                  <a:srgbClr val="A78BFA"/>
-                </a:solidFill>
-                <a:latin typeface="Calibri" pitchFamily="34" charset="0"/>
-                <a:ea typeface="Calibri" pitchFamily="34" charset="-122"/>
-                <a:cs typeface="Calibri" pitchFamily="34" charset="-120"/>
-              </a:rPr>
-              <a:t>5MP Macro</a:t>
-            </a:r>
-            <a:endParaRPr lang="en-US" sz="1300" dirty="0"/>
-          </a:p>
-        </p:txBody>
-      </p:sp>
-      <p:sp>
-        <p:nvSpPr>
-          <p:cNvPr id="24" name="Text 22"/>
-          <p:cNvSpPr/>
-          <p:nvPr/>
-        </p:nvSpPr>
-        <p:spPr>
-          <a:xfrm>
-            <a:off x="4754880" y="4151376"/>
-            <a:ext cx="1828800" cy="228600"/>
-          </a:xfrm>
-          <a:prstGeom prst="rect">
-            <a:avLst/>
-          </a:prstGeom>
-          <a:noFill/>
-          <a:ln/>
-        </p:spPr>
-        <p:txBody>
-          <a:bodyPr wrap="square" rtlCol="0" anchor="ctr"/>
-          <a:lstStyle/>
-          <a:p>
-            <a:pPr algn="ctr" indent="0" marL="0">
-              <a:buNone/>
-            </a:pPr>
-            <a:r>
-              <a:rPr lang="en-US" sz="800" b="1" dirty="0">
-                <a:solidFill>
-                  <a:srgbClr val="94A3B8"/>
-                </a:solidFill>
-                <a:latin typeface="Calibri" pitchFamily="34" charset="0"/>
-                <a:ea typeface="Calibri" pitchFamily="34" charset="-122"/>
-                <a:cs typeface="Calibri" pitchFamily="34" charset="-120"/>
-              </a:rPr>
-              <a:t>Customer Photo Proof</a:t>
-            </a:r>
-            <a:endParaRPr lang="en-US" sz="800" dirty="0"/>
-          </a:p>
-        </p:txBody>
-      </p:sp>
-      <p:sp>
-        <p:nvSpPr>
-          <p:cNvPr id="25" name="Shape 23"/>
-          <p:cNvSpPr/>
-          <p:nvPr/>
-        </p:nvSpPr>
-        <p:spPr>
-          <a:xfrm>
-            <a:off x="6766560" y="3794760"/>
-            <a:ext cx="1828800" cy="658368"/>
-          </a:xfrm>
-          <a:prstGeom prst="roundRect">
-            <a:avLst>
-              <a:gd name="adj" fmla="val 11111"/>
-            </a:avLst>
-          </a:prstGeom>
-          <a:solidFill>
-            <a:srgbClr val="2A0E17"/>
-          </a:solidFill>
-          <a:ln w="12700">
-            <a:solidFill>
-              <a:srgbClr val="E11D48"/>
-            </a:solidFill>
-            <a:prstDash val="solid"/>
-          </a:ln>
-        </p:spPr>
-      </p:sp>
-      <p:sp>
-        <p:nvSpPr>
-          <p:cNvPr id="26" name="Text 24"/>
-          <p:cNvSpPr/>
-          <p:nvPr/>
-        </p:nvSpPr>
-        <p:spPr>
-          <a:xfrm>
-            <a:off x="6766560" y="3840480"/>
-            <a:ext cx="1828800" cy="292608"/>
-          </a:xfrm>
-          <a:prstGeom prst="rect">
-            <a:avLst/>
-          </a:prstGeom>
-          <a:noFill/>
-          <a:ln/>
-        </p:spPr>
-        <p:txBody>
-          <a:bodyPr wrap="square" rtlCol="0" anchor="ctr"/>
-          <a:lstStyle/>
-          <a:p>
-            <a:pPr algn="ctr" indent="0" marL="0">
-              <a:buNone/>
-            </a:pPr>
-            <a:r>
-              <a:rPr lang="en-US" sz="1300" b="1" dirty="0">
-                <a:solidFill>
-                  <a:srgbClr val="FB7185"/>
-                </a:solidFill>
-                <a:latin typeface="Calibri" pitchFamily="34" charset="0"/>
-                <a:ea typeface="Calibri" pitchFamily="34" charset="-122"/>
-                <a:cs typeface="Calibri" pitchFamily="34" charset="-120"/>
-              </a:rPr>
-              <a:t>Zero E-Waste</a:t>
-            </a:r>
-            <a:endParaRPr lang="en-US" sz="1300" dirty="0"/>
-          </a:p>
-        </p:txBody>
-      </p:sp>
-      <p:sp>
-        <p:nvSpPr>
-          <p:cNvPr id="27" name="Text 25"/>
-          <p:cNvSpPr/>
-          <p:nvPr/>
-        </p:nvSpPr>
-        <p:spPr>
-          <a:xfrm>
-            <a:off x="6766560" y="4151376"/>
-            <a:ext cx="1828800" cy="228600"/>
-          </a:xfrm>
-          <a:prstGeom prst="rect">
-            <a:avLst/>
-          </a:prstGeom>
-          <a:noFill/>
-          <a:ln/>
-        </p:spPr>
-        <p:txBody>
-          <a:bodyPr wrap="square" rtlCol="0" anchor="ctr"/>
-          <a:lstStyle/>
-          <a:p>
-            <a:pPr algn="ctr" indent="0" marL="0">
-              <a:buNone/>
-            </a:pPr>
-            <a:r>
-              <a:rPr lang="en-US" sz="800" b="1" dirty="0">
-                <a:solidFill>
-                  <a:srgbClr val="94A3B8"/>
-                </a:solidFill>
-                <a:latin typeface="Calibri" pitchFamily="34" charset="0"/>
-                <a:ea typeface="Calibri" pitchFamily="34" charset="-122"/>
-                <a:cs typeface="Calibri" pitchFamily="34" charset="-120"/>
-              </a:rPr>
-              <a:t>Circular Economy Goal</a:t>
-            </a:r>
-            <a:endParaRPr lang="en-US" sz="800" dirty="0"/>
-          </a:p>
-        </p:txBody>
-      </p:sp>
-      <p:sp>
-        <p:nvSpPr>
-          <p:cNvPr id="28" name="Shape 26"/>
+              <a:t>Heavy appliances &amp; electronics flood landfills, leaching toxic metals while factories burn carbon for replacements.</a:t>
+            </a:r>
+            <a:endParaRPr lang="en-US" sz="850" dirty="0"/>
+          </a:p>
+        </p:txBody>
+      </p:sp>
+      <p:sp>
+        <p:nvSpPr>
+          <p:cNvPr id="24" name="Shape 22"/>
           <p:cNvSpPr/>
           <p:nvPr/>
         </p:nvSpPr>
@@ -3350,7 +3191,7 @@
       </p:sp>
       <p:sp>
         <p:nvSpPr>
-          <p:cNvPr id="29" name="Text 27"/>
+          <p:cNvPr id="25" name="Text 23"/>
           <p:cNvSpPr/>
           <p:nvPr/>
         </p:nvSpPr>
@@ -3395,7 +3236,7 @@
                 <a:ea typeface="Calibri" pitchFamily="34" charset="-122"/>
                 <a:cs typeface="Calibri" pitchFamily="34" charset="-120"/>
               </a:rPr>
-              <a:t>www.vytron.me</a:t>
+              <a:t>fixgrid.vytron.me</a:t>
             </a:r>
             <a:endParaRPr lang="en-US" sz="900" dirty="0"/>
           </a:p>
@@ -3403,7 +3244,7 @@
       </p:sp>
       <p:sp>
         <p:nvSpPr>
-          <p:cNvPr id="30" name="Text 28"/>
+          <p:cNvPr id="26" name="Text 24"/>
           <p:cNvSpPr/>
           <p:nvPr/>
         </p:nvSpPr>
@@ -3442,7 +3283,7 @@
       </p:sp>
       <p:sp>
         <p:nvSpPr>
-          <p:cNvPr id="31" name="Text 29"/>
+          <p:cNvPr id="27" name="Text 25"/>
           <p:cNvSpPr/>
           <p:nvPr/>
         </p:nvSpPr>
@@ -3544,7 +3385,7 @@
                 <a:ea typeface="Calibri" pitchFamily="34" charset="-122"/>
                 <a:cs typeface="Calibri" pitchFamily="34" charset="-120"/>
               </a:rPr>
-              <a:t>// 03 • THE CHALLENGE</a:t>
+              <a:t>// 03 • PROPOSED SOLUTION</a:t>
             </a:r>
             <a:endParaRPr lang="en-US" sz="900" dirty="0"/>
           </a:p>
@@ -3641,7 +3482,7 @@
               <a:buNone/>
             </a:pPr>
             <a:r>
-              <a:rPr lang="en-US" sz="2300" b="1" dirty="0">
+              <a:rPr lang="en-US" sz="2050" b="1" dirty="0">
                 <a:solidFill>
                   <a:srgbClr val="FFFFFF"/>
                 </a:solidFill>
@@ -3649,9 +3490,9 @@
                 <a:ea typeface="Cambria" pitchFamily="34" charset="-122"/>
                 <a:cs typeface="Cambria" pitchFamily="34" charset="-120"/>
               </a:rPr>
-              <a:t>The Throwaway Culture &amp; The Diagnostic Void</a:t>
-            </a:r>
-            <a:endParaRPr lang="en-US" sz="2300" dirty="0"/>
+              <a:t>Proposed Solution: The FixGrid Hardware-Software Innovation</a:t>
+            </a:r>
+            <a:endParaRPr lang="en-US" sz="2050" dirty="0"/>
           </a:p>
         </p:txBody>
       </p:sp>
@@ -3664,11 +3505,826 @@
         <p:spPr>
           <a:xfrm>
             <a:off x="548640" y="1234440"/>
-            <a:ext cx="3886200" cy="1874520"/>
+            <a:ext cx="3886200" cy="2423160"/>
           </a:xfrm>
           <a:prstGeom prst="roundRect">
             <a:avLst>
-              <a:gd name="adj" fmla="val 3902"/>
+              <a:gd name="adj" fmla="val 3019"/>
+            </a:avLst>
+          </a:prstGeom>
+          <a:solidFill>
+            <a:srgbClr val="111827"/>
+          </a:solidFill>
+          <a:ln w="12700">
+            <a:solidFill>
+              <a:srgbClr val="1F293D"/>
+            </a:solidFill>
+            <a:prstDash val="solid"/>
+          </a:ln>
+        </p:spPr>
+      </p:sp>
+      <p:sp>
+        <p:nvSpPr>
+          <p:cNvPr id="7" name="Shape 5"/>
+          <p:cNvSpPr/>
+          <p:nvPr/>
+        </p:nvSpPr>
+        <p:spPr>
+          <a:xfrm>
+            <a:off x="731520" y="1371600"/>
+            <a:ext cx="1828800" cy="219456"/>
+          </a:xfrm>
+          <a:prstGeom prst="roundRect">
+            <a:avLst>
+              <a:gd name="adj" fmla="val 16667"/>
+            </a:avLst>
+          </a:prstGeom>
+          <a:solidFill>
+            <a:srgbClr val="0B253A"/>
+          </a:solidFill>
+          <a:ln w="12700">
+            <a:solidFill>
+              <a:srgbClr val="0284C7"/>
+            </a:solidFill>
+            <a:prstDash val="solid"/>
+          </a:ln>
+        </p:spPr>
+      </p:sp>
+      <p:sp>
+        <p:nvSpPr>
+          <p:cNvPr id="8" name="Text 6"/>
+          <p:cNvSpPr/>
+          <p:nvPr/>
+        </p:nvSpPr>
+        <p:spPr>
+          <a:xfrm>
+            <a:off x="731520" y="1371600"/>
+            <a:ext cx="1828800" cy="219456"/>
+          </a:xfrm>
+          <a:prstGeom prst="rect">
+            <a:avLst/>
+          </a:prstGeom>
+          <a:noFill/>
+          <a:ln/>
+        </p:spPr>
+        <p:txBody>
+          <a:bodyPr wrap="square" rtlCol="0" anchor="ctr"/>
+          <a:lstStyle/>
+          <a:p>
+            <a:pPr algn="ctr" indent="0" marL="0">
+              <a:buNone/>
+            </a:pPr>
+            <a:r>
+              <a:rPr lang="en-US" sz="800" b="1" dirty="0">
+                <a:solidFill>
+                  <a:srgbClr val="38BDF8"/>
+                </a:solidFill>
+                <a:latin typeface="Calibri" pitchFamily="34" charset="0"/>
+                <a:ea typeface="Calibri" pitchFamily="34" charset="-122"/>
+                <a:cs typeface="Calibri" pitchFamily="34" charset="-120"/>
+              </a:rPr>
+              <a:t>PILLAR 1: DIGITAL PLATFORM</a:t>
+            </a:r>
+            <a:endParaRPr lang="en-US" sz="800" dirty="0"/>
+          </a:p>
+        </p:txBody>
+      </p:sp>
+      <p:sp>
+        <p:nvSpPr>
+          <p:cNvPr id="9" name="Text 7"/>
+          <p:cNvSpPr/>
+          <p:nvPr/>
+        </p:nvSpPr>
+        <p:spPr>
+          <a:xfrm>
+            <a:off x="731520" y="1664208"/>
+            <a:ext cx="3520440" cy="256032"/>
+          </a:xfrm>
+          <a:prstGeom prst="rect">
+            <a:avLst/>
+          </a:prstGeom>
+          <a:noFill/>
+          <a:ln/>
+        </p:spPr>
+        <p:txBody>
+          <a:bodyPr wrap="square" rtlCol="0" anchor="ctr"/>
+          <a:lstStyle/>
+          <a:p>
+            <a:pPr indent="0" marL="0">
+              <a:buNone/>
+            </a:pPr>
+            <a:r>
+              <a:rPr lang="en-US" sz="1250" b="1" dirty="0">
+                <a:solidFill>
+                  <a:srgbClr val="FFFFFF"/>
+                </a:solidFill>
+                <a:latin typeface="Calibri" pitchFamily="34" charset="0"/>
+                <a:ea typeface="Calibri" pitchFamily="34" charset="-122"/>
+                <a:cs typeface="Calibri" pitchFamily="34" charset="-120"/>
+              </a:rPr>
+              <a:t>FixGrid Trust &amp; Warranty Cloud Engine</a:t>
+            </a:r>
+            <a:endParaRPr lang="en-US" sz="1250" dirty="0"/>
+          </a:p>
+        </p:txBody>
+      </p:sp>
+      <p:sp>
+        <p:nvSpPr>
+          <p:cNvPr id="10" name="Text 8"/>
+          <p:cNvSpPr/>
+          <p:nvPr/>
+        </p:nvSpPr>
+        <p:spPr>
+          <a:xfrm>
+            <a:off x="731520" y="1965960"/>
+            <a:ext cx="3520440" cy="1554480"/>
+          </a:xfrm>
+          <a:prstGeom prst="rect">
+            <a:avLst/>
+          </a:prstGeom>
+          <a:noFill/>
+          <a:ln/>
+        </p:spPr>
+        <p:txBody>
+          <a:bodyPr wrap="square" rtlCol="0" anchor="ctr"/>
+          <a:lstStyle/>
+          <a:p>
+            <a:pPr marL="342900" indent="-342900">
+              <a:lnSpc>
+                <a:spcPct val="115000"/>
+              </a:lnSpc>
+              <a:spcAft>
+                <a:spcPts val="400"/>
+              </a:spcAft>
+              <a:buSzPct val="100000"/>
+              <a:buChar char="•"/>
+            </a:pPr>
+            <a:r>
+              <a:rPr lang="en-US" sz="900" dirty="0">
+                <a:solidFill>
+                  <a:srgbClr val="CBD5E1"/>
+                </a:solidFill>
+                <a:latin typeface="Calibri" pitchFamily="34" charset="0"/>
+                <a:ea typeface="Calibri" pitchFamily="34" charset="-122"/>
+                <a:cs typeface="Calibri" pitchFamily="34" charset="-120"/>
+              </a:rPr>
+              <a:t>All 21+ Categories: Covers Home Appliances, Consumer Tech, Power Tools, EVs &amp; Wearables.</a:t>
+            </a:r>
+            <a:endParaRPr lang="en-US" sz="900" dirty="0"/>
+          </a:p>
+          <a:p>
+            <a:pPr marL="342900" indent="-342900">
+              <a:lnSpc>
+                <a:spcPct val="115000"/>
+              </a:lnSpc>
+              <a:spcAft>
+                <a:spcPts val="400"/>
+              </a:spcAft>
+              <a:buSzPct val="100000"/>
+              <a:buChar char="•"/>
+            </a:pPr>
+            <a:r>
+              <a:rPr lang="en-US" sz="900" dirty="0">
+                <a:solidFill>
+                  <a:srgbClr val="CBD5E1"/>
+                </a:solidFill>
+                <a:latin typeface="Calibri" pitchFamily="34" charset="0"/>
+                <a:ea typeface="Calibri" pitchFamily="34" charset="-122"/>
+                <a:cs typeface="Calibri" pitchFamily="34" charset="-120"/>
+              </a:rPr>
+              <a:t>Upfront Smart Escrow: Customer payments locked safely at booking; released on verified sign-off.</a:t>
+            </a:r>
+            <a:endParaRPr lang="en-US" sz="900" dirty="0"/>
+          </a:p>
+          <a:p>
+            <a:pPr marL="342900" indent="-342900">
+              <a:lnSpc>
+                <a:spcPct val="115000"/>
+              </a:lnSpc>
+              <a:spcAft>
+                <a:spcPts val="400"/>
+              </a:spcAft>
+              <a:buSzPct val="100000"/>
+              <a:buChar char="•"/>
+            </a:pPr>
+            <a:r>
+              <a:rPr lang="en-US" sz="900" dirty="0">
+                <a:solidFill>
+                  <a:srgbClr val="CBD5E1"/>
+                </a:solidFill>
+                <a:latin typeface="Calibri" pitchFamily="34" charset="0"/>
+                <a:ea typeface="Calibri" pitchFamily="34" charset="-122"/>
+                <a:cs typeface="Calibri" pitchFamily="34" charset="-120"/>
+              </a:rPr>
+              <a:t>90-Day Digital Warranty: Platform-guaranteed warranty passport verifiable on any smartphone.</a:t>
+            </a:r>
+            <a:endParaRPr lang="en-US" sz="900" dirty="0"/>
+          </a:p>
+          <a:p>
+            <a:pPr marL="342900" indent="-342900">
+              <a:lnSpc>
+                <a:spcPct val="115000"/>
+              </a:lnSpc>
+              <a:spcAft>
+                <a:spcPts val="400"/>
+              </a:spcAft>
+              <a:buSzPct val="100000"/>
+              <a:buChar char="•"/>
+            </a:pPr>
+            <a:r>
+              <a:rPr lang="en-US" sz="900" dirty="0">
+                <a:solidFill>
+                  <a:srgbClr val="CBD5E1"/>
+                </a:solidFill>
+                <a:latin typeface="Calibri" pitchFamily="34" charset="0"/>
+                <a:ea typeface="Calibri" pitchFamily="34" charset="-122"/>
+                <a:cs typeface="Calibri" pitchFamily="34" charset="-120"/>
+              </a:rPr>
+              <a:t>Artisan Empowerment: Digital storefronts, verified reviews &amp; 5% completed-job rebate.</a:t>
+            </a:r>
+            <a:endParaRPr lang="en-US" sz="900" dirty="0"/>
+          </a:p>
+        </p:txBody>
+      </p:sp>
+      <p:sp>
+        <p:nvSpPr>
+          <p:cNvPr id="11" name="Shape 9"/>
+          <p:cNvSpPr/>
+          <p:nvPr/>
+        </p:nvSpPr>
+        <p:spPr>
+          <a:xfrm>
+            <a:off x="4709160" y="1234440"/>
+            <a:ext cx="3886200" cy="2423160"/>
+          </a:xfrm>
+          <a:prstGeom prst="roundRect">
+            <a:avLst>
+              <a:gd name="adj" fmla="val 3019"/>
+            </a:avLst>
+          </a:prstGeom>
+          <a:solidFill>
+            <a:srgbClr val="111827"/>
+          </a:solidFill>
+          <a:ln w="12700">
+            <a:solidFill>
+              <a:srgbClr val="1F293D"/>
+            </a:solidFill>
+            <a:prstDash val="solid"/>
+          </a:ln>
+        </p:spPr>
+      </p:sp>
+      <p:sp>
+        <p:nvSpPr>
+          <p:cNvPr id="12" name="Shape 10"/>
+          <p:cNvSpPr/>
+          <p:nvPr/>
+        </p:nvSpPr>
+        <p:spPr>
+          <a:xfrm>
+            <a:off x="4892040" y="1371600"/>
+            <a:ext cx="1828800" cy="219456"/>
+          </a:xfrm>
+          <a:prstGeom prst="roundRect">
+            <a:avLst>
+              <a:gd name="adj" fmla="val 16667"/>
+            </a:avLst>
+          </a:prstGeom>
+          <a:solidFill>
+            <a:srgbClr val="07291E"/>
+          </a:solidFill>
+          <a:ln w="12700">
+            <a:solidFill>
+              <a:srgbClr val="059669"/>
+            </a:solidFill>
+            <a:prstDash val="solid"/>
+          </a:ln>
+        </p:spPr>
+      </p:sp>
+      <p:sp>
+        <p:nvSpPr>
+          <p:cNvPr id="13" name="Text 11"/>
+          <p:cNvSpPr/>
+          <p:nvPr/>
+        </p:nvSpPr>
+        <p:spPr>
+          <a:xfrm>
+            <a:off x="4892040" y="1371600"/>
+            <a:ext cx="1828800" cy="219456"/>
+          </a:xfrm>
+          <a:prstGeom prst="rect">
+            <a:avLst/>
+          </a:prstGeom>
+          <a:noFill/>
+          <a:ln/>
+        </p:spPr>
+        <p:txBody>
+          <a:bodyPr wrap="square" rtlCol="0" anchor="ctr"/>
+          <a:lstStyle/>
+          <a:p>
+            <a:pPr algn="ctr" indent="0" marL="0">
+              <a:buNone/>
+            </a:pPr>
+            <a:r>
+              <a:rPr lang="en-US" sz="800" b="1" dirty="0">
+                <a:solidFill>
+                  <a:srgbClr val="34D399"/>
+                </a:solidFill>
+                <a:latin typeface="Calibri" pitchFamily="34" charset="0"/>
+                <a:ea typeface="Calibri" pitchFamily="34" charset="-122"/>
+                <a:cs typeface="Calibri" pitchFamily="34" charset="-120"/>
+              </a:rPr>
+              <a:t>PILLAR 2: HARDWARE WAND</a:t>
+            </a:r>
+            <a:endParaRPr lang="en-US" sz="800" dirty="0"/>
+          </a:p>
+        </p:txBody>
+      </p:sp>
+      <p:sp>
+        <p:nvSpPr>
+          <p:cNvPr id="14" name="Text 12"/>
+          <p:cNvSpPr/>
+          <p:nvPr/>
+        </p:nvSpPr>
+        <p:spPr>
+          <a:xfrm>
+            <a:off x="4892040" y="1664208"/>
+            <a:ext cx="3520440" cy="256032"/>
+          </a:xfrm>
+          <a:prstGeom prst="rect">
+            <a:avLst/>
+          </a:prstGeom>
+          <a:noFill/>
+          <a:ln/>
+        </p:spPr>
+        <p:txBody>
+          <a:bodyPr wrap="square" rtlCol="0" anchor="ctr"/>
+          <a:lstStyle/>
+          <a:p>
+            <a:pPr indent="0" marL="0">
+              <a:buNone/>
+            </a:pPr>
+            <a:r>
+              <a:rPr lang="en-US" sz="1250" b="1" dirty="0">
+                <a:solidFill>
+                  <a:srgbClr val="FFFFFF"/>
+                </a:solidFill>
+                <a:latin typeface="Calibri" pitchFamily="34" charset="0"/>
+                <a:ea typeface="Calibri" pitchFamily="34" charset="-122"/>
+                <a:cs typeface="Calibri" pitchFamily="34" charset="-120"/>
+              </a:rPr>
+              <a:t>SafeProbe™ Multimodal Diagnostic Tool</a:t>
+            </a:r>
+            <a:endParaRPr lang="en-US" sz="1250" dirty="0"/>
+          </a:p>
+        </p:txBody>
+      </p:sp>
+      <p:sp>
+        <p:nvSpPr>
+          <p:cNvPr id="15" name="Text 13"/>
+          <p:cNvSpPr/>
+          <p:nvPr/>
+        </p:nvSpPr>
+        <p:spPr>
+          <a:xfrm>
+            <a:off x="4892040" y="1965960"/>
+            <a:ext cx="3520440" cy="1554480"/>
+          </a:xfrm>
+          <a:prstGeom prst="rect">
+            <a:avLst/>
+          </a:prstGeom>
+          <a:noFill/>
+          <a:ln/>
+        </p:spPr>
+        <p:txBody>
+          <a:bodyPr wrap="square" rtlCol="0" anchor="ctr"/>
+          <a:lstStyle/>
+          <a:p>
+            <a:pPr marL="342900" indent="-342900">
+              <a:lnSpc>
+                <a:spcPct val="115000"/>
+              </a:lnSpc>
+              <a:spcAft>
+                <a:spcPts val="400"/>
+              </a:spcAft>
+              <a:buSzPct val="100000"/>
+              <a:buChar char="•"/>
+            </a:pPr>
+            <a:r>
+              <a:rPr lang="en-US" sz="900" dirty="0">
+                <a:solidFill>
+                  <a:srgbClr val="CBD5E1"/>
+                </a:solidFill>
+                <a:latin typeface="Calibri" pitchFamily="34" charset="0"/>
+                <a:ea typeface="Calibri" pitchFamily="34" charset="-122"/>
+                <a:cs typeface="Calibri" pitchFamily="34" charset="-120"/>
+              </a:rPr>
+              <a:t>0.40V Sub-Junction Divider: Clamps below 0.6V P-N junction—tests in-circuit without desoldering.</a:t>
+            </a:r>
+            <a:endParaRPr lang="en-US" sz="900" dirty="0"/>
+          </a:p>
+          <a:p>
+            <a:pPr marL="342900" indent="-342900">
+              <a:lnSpc>
+                <a:spcPct val="115000"/>
+              </a:lnSpc>
+              <a:spcAft>
+                <a:spcPts val="400"/>
+              </a:spcAft>
+              <a:buSzPct val="100000"/>
+              <a:buChar char="•"/>
+            </a:pPr>
+            <a:r>
+              <a:rPr lang="en-US" sz="900" dirty="0">
+                <a:solidFill>
+                  <a:srgbClr val="CBD5E1"/>
+                </a:solidFill>
+                <a:latin typeface="Calibri" pitchFamily="34" charset="0"/>
+                <a:ea typeface="Calibri" pitchFamily="34" charset="-122"/>
+                <a:cs typeface="Calibri" pitchFamily="34" charset="-120"/>
+              </a:rPr>
+              <a:t>16-Bit ADS1115 + Tone: Pitch-shift audio buzzer (1.2kHz → 2.4kHz) guides to shorted 0402 SMDs.</a:t>
+            </a:r>
+            <a:endParaRPr lang="en-US" sz="900" dirty="0"/>
+          </a:p>
+          <a:p>
+            <a:pPr marL="342900" indent="-342900">
+              <a:lnSpc>
+                <a:spcPct val="115000"/>
+              </a:lnSpc>
+              <a:spcAft>
+                <a:spcPts val="400"/>
+              </a:spcAft>
+              <a:buSzPct val="100000"/>
+              <a:buChar char="•"/>
+            </a:pPr>
+            <a:r>
+              <a:rPr lang="en-US" sz="900" dirty="0">
+                <a:solidFill>
+                  <a:srgbClr val="CBD5E1"/>
+                </a:solidFill>
+                <a:latin typeface="Calibri" pitchFamily="34" charset="0"/>
+                <a:ea typeface="Calibri" pitchFamily="34" charset="-122"/>
+                <a:cs typeface="Calibri" pitchFamily="34" charset="-120"/>
+              </a:rPr>
+              <a:t>ESP32-CAM Microscope: 2.5cm macro lens &amp; shadowless ring LEDs captures HD fault photo proof.</a:t>
+            </a:r>
+            <a:endParaRPr lang="en-US" sz="900" dirty="0"/>
+          </a:p>
+          <a:p>
+            <a:pPr marL="342900" indent="-342900">
+              <a:lnSpc>
+                <a:spcPct val="115000"/>
+              </a:lnSpc>
+              <a:spcAft>
+                <a:spcPts val="400"/>
+              </a:spcAft>
+              <a:buSzPct val="100000"/>
+              <a:buChar char="•"/>
+            </a:pPr>
+            <a:r>
+              <a:rPr lang="en-US" sz="900" dirty="0">
+                <a:solidFill>
+                  <a:srgbClr val="CBD5E1"/>
+                </a:solidFill>
+                <a:latin typeface="Calibri" pitchFamily="34" charset="0"/>
+                <a:ea typeface="Calibri" pitchFamily="34" charset="-122"/>
+                <a:cs typeface="Calibri" pitchFamily="34" charset="-120"/>
+              </a:rPr>
+              <a:t>Hardware Trust-Gate: Transmits cryptographic VERIFIED_PASS token to release escrow funds.</a:t>
+            </a:r>
+            <a:endParaRPr lang="en-US" sz="900" dirty="0"/>
+          </a:p>
+        </p:txBody>
+      </p:sp>
+      <p:sp>
+        <p:nvSpPr>
+          <p:cNvPr id="16" name="Shape 14"/>
+          <p:cNvSpPr/>
+          <p:nvPr/>
+        </p:nvSpPr>
+        <p:spPr>
+          <a:xfrm>
+            <a:off x="548640" y="3794760"/>
+            <a:ext cx="1920240" cy="658368"/>
+          </a:xfrm>
+          <a:prstGeom prst="roundRect">
+            <a:avLst>
+              <a:gd name="adj" fmla="val 11111"/>
+            </a:avLst>
+          </a:prstGeom>
+          <a:solidFill>
+            <a:srgbClr val="07291E"/>
+          </a:solidFill>
+          <a:ln w="12700">
+            <a:solidFill>
+              <a:srgbClr val="059669"/>
+            </a:solidFill>
+            <a:prstDash val="solid"/>
+          </a:ln>
+        </p:spPr>
+      </p:sp>
+      <p:sp>
+        <p:nvSpPr>
+          <p:cNvPr id="17" name="Text 15"/>
+          <p:cNvSpPr/>
+          <p:nvPr/>
+        </p:nvSpPr>
+        <p:spPr>
+          <a:xfrm>
+            <a:off x="548640" y="3840480"/>
+            <a:ext cx="1920240" cy="292608"/>
+          </a:xfrm>
+          <a:prstGeom prst="rect">
+            <a:avLst/>
+          </a:prstGeom>
+          <a:noFill/>
+          <a:ln/>
+        </p:spPr>
+        <p:txBody>
+          <a:bodyPr wrap="square" rtlCol="0" anchor="ctr"/>
+          <a:lstStyle/>
+          <a:p>
+            <a:pPr algn="ctr" indent="0" marL="0">
+              <a:buNone/>
+            </a:pPr>
+            <a:r>
+              <a:rPr lang="en-US" sz="1300" b="1" dirty="0">
+                <a:solidFill>
+                  <a:srgbClr val="34D399"/>
+                </a:solidFill>
+                <a:latin typeface="Calibri" pitchFamily="34" charset="0"/>
+                <a:ea typeface="Calibri" pitchFamily="34" charset="-122"/>
+                <a:cs typeface="Calibri" pitchFamily="34" charset="-120"/>
+              </a:rPr>
+              <a:t>₹1,795 BOM</a:t>
+            </a:r>
+            <a:endParaRPr lang="en-US" sz="1300" dirty="0"/>
+          </a:p>
+        </p:txBody>
+      </p:sp>
+      <p:sp>
+        <p:nvSpPr>
+          <p:cNvPr id="18" name="Text 16"/>
+          <p:cNvSpPr/>
+          <p:nvPr/>
+        </p:nvSpPr>
+        <p:spPr>
+          <a:xfrm>
+            <a:off x="548640" y="4151376"/>
+            <a:ext cx="1920240" cy="228600"/>
+          </a:xfrm>
+          <a:prstGeom prst="rect">
+            <a:avLst/>
+          </a:prstGeom>
+          <a:noFill/>
+          <a:ln/>
+        </p:spPr>
+        <p:txBody>
+          <a:bodyPr wrap="square" rtlCol="0" anchor="ctr"/>
+          <a:lstStyle/>
+          <a:p>
+            <a:pPr algn="ctr" indent="0" marL="0">
+              <a:buNone/>
+            </a:pPr>
+            <a:r>
+              <a:rPr lang="en-US" sz="800" b="1" dirty="0">
+                <a:solidFill>
+                  <a:srgbClr val="94A3B8"/>
+                </a:solidFill>
+                <a:latin typeface="Calibri" pitchFamily="34" charset="0"/>
+                <a:ea typeface="Calibri" pitchFamily="34" charset="-122"/>
+                <a:cs typeface="Calibri" pitchFamily="34" charset="-120"/>
+              </a:rPr>
+              <a:t>Frugal Prototype Cost</a:t>
+            </a:r>
+            <a:endParaRPr lang="en-US" sz="800" dirty="0"/>
+          </a:p>
+        </p:txBody>
+      </p:sp>
+      <p:sp>
+        <p:nvSpPr>
+          <p:cNvPr id="19" name="Shape 17"/>
+          <p:cNvSpPr/>
+          <p:nvPr/>
+        </p:nvSpPr>
+        <p:spPr>
+          <a:xfrm>
+            <a:off x="2651760" y="3794760"/>
+            <a:ext cx="1920240" cy="658368"/>
+          </a:xfrm>
+          <a:prstGeom prst="roundRect">
+            <a:avLst>
+              <a:gd name="adj" fmla="val 11111"/>
+            </a:avLst>
+          </a:prstGeom>
+          <a:solidFill>
+            <a:srgbClr val="0B253A"/>
+          </a:solidFill>
+          <a:ln w="12700">
+            <a:solidFill>
+              <a:srgbClr val="0284C7"/>
+            </a:solidFill>
+            <a:prstDash val="solid"/>
+          </a:ln>
+        </p:spPr>
+      </p:sp>
+      <p:sp>
+        <p:nvSpPr>
+          <p:cNvPr id="20" name="Text 18"/>
+          <p:cNvSpPr/>
+          <p:nvPr/>
+        </p:nvSpPr>
+        <p:spPr>
+          <a:xfrm>
+            <a:off x="2651760" y="3840480"/>
+            <a:ext cx="1920240" cy="292608"/>
+          </a:xfrm>
+          <a:prstGeom prst="rect">
+            <a:avLst/>
+          </a:prstGeom>
+          <a:noFill/>
+          <a:ln/>
+        </p:spPr>
+        <p:txBody>
+          <a:bodyPr wrap="square" rtlCol="0" anchor="ctr"/>
+          <a:lstStyle/>
+          <a:p>
+            <a:pPr algn="ctr" indent="0" marL="0">
+              <a:buNone/>
+            </a:pPr>
+            <a:r>
+              <a:rPr lang="en-US" sz="1300" b="1" dirty="0">
+                <a:solidFill>
+                  <a:srgbClr val="38BDF8"/>
+                </a:solidFill>
+                <a:latin typeface="Calibri" pitchFamily="34" charset="0"/>
+                <a:ea typeface="Calibri" pitchFamily="34" charset="-122"/>
+                <a:cs typeface="Calibri" pitchFamily="34" charset="-120"/>
+              </a:rPr>
+              <a:t>0.40V Clamp</a:t>
+            </a:r>
+            <a:endParaRPr lang="en-US" sz="1300" dirty="0"/>
+          </a:p>
+        </p:txBody>
+      </p:sp>
+      <p:sp>
+        <p:nvSpPr>
+          <p:cNvPr id="21" name="Text 19"/>
+          <p:cNvSpPr/>
+          <p:nvPr/>
+        </p:nvSpPr>
+        <p:spPr>
+          <a:xfrm>
+            <a:off x="2651760" y="4151376"/>
+            <a:ext cx="1920240" cy="228600"/>
+          </a:xfrm>
+          <a:prstGeom prst="rect">
+            <a:avLst/>
+          </a:prstGeom>
+          <a:noFill/>
+          <a:ln/>
+        </p:spPr>
+        <p:txBody>
+          <a:bodyPr wrap="square" rtlCol="0" anchor="ctr"/>
+          <a:lstStyle/>
+          <a:p>
+            <a:pPr algn="ctr" indent="0" marL="0">
+              <a:buNone/>
+            </a:pPr>
+            <a:r>
+              <a:rPr lang="en-US" sz="800" b="1" dirty="0">
+                <a:solidFill>
+                  <a:srgbClr val="94A3B8"/>
+                </a:solidFill>
+                <a:latin typeface="Calibri" pitchFamily="34" charset="0"/>
+                <a:ea typeface="Calibri" pitchFamily="34" charset="-122"/>
+                <a:cs typeface="Calibri" pitchFamily="34" charset="-120"/>
+              </a:rPr>
+              <a:t>Sub-Junction In-Circuit</a:t>
+            </a:r>
+            <a:endParaRPr lang="en-US" sz="800" dirty="0"/>
+          </a:p>
+        </p:txBody>
+      </p:sp>
+      <p:sp>
+        <p:nvSpPr>
+          <p:cNvPr id="22" name="Shape 20"/>
+          <p:cNvSpPr/>
+          <p:nvPr/>
+        </p:nvSpPr>
+        <p:spPr>
+          <a:xfrm>
+            <a:off x="4754880" y="3794760"/>
+            <a:ext cx="1828800" cy="658368"/>
+          </a:xfrm>
+          <a:prstGeom prst="roundRect">
+            <a:avLst>
+              <a:gd name="adj" fmla="val 11111"/>
+            </a:avLst>
+          </a:prstGeom>
+          <a:solidFill>
+            <a:srgbClr val="23153C"/>
+          </a:solidFill>
+          <a:ln w="12700">
+            <a:solidFill>
+              <a:srgbClr val="7C3AED"/>
+            </a:solidFill>
+            <a:prstDash val="solid"/>
+          </a:ln>
+        </p:spPr>
+      </p:sp>
+      <p:sp>
+        <p:nvSpPr>
+          <p:cNvPr id="23" name="Text 21"/>
+          <p:cNvSpPr/>
+          <p:nvPr/>
+        </p:nvSpPr>
+        <p:spPr>
+          <a:xfrm>
+            <a:off x="4754880" y="3840480"/>
+            <a:ext cx="1828800" cy="292608"/>
+          </a:xfrm>
+          <a:prstGeom prst="rect">
+            <a:avLst/>
+          </a:prstGeom>
+          <a:noFill/>
+          <a:ln/>
+        </p:spPr>
+        <p:txBody>
+          <a:bodyPr wrap="square" rtlCol="0" anchor="ctr"/>
+          <a:lstStyle/>
+          <a:p>
+            <a:pPr algn="ctr" indent="0" marL="0">
+              <a:buNone/>
+            </a:pPr>
+            <a:r>
+              <a:rPr lang="en-US" sz="1300" b="1" dirty="0">
+                <a:solidFill>
+                  <a:srgbClr val="A78BFA"/>
+                </a:solidFill>
+                <a:latin typeface="Calibri" pitchFamily="34" charset="0"/>
+                <a:ea typeface="Calibri" pitchFamily="34" charset="-122"/>
+                <a:cs typeface="Calibri" pitchFamily="34" charset="-120"/>
+              </a:rPr>
+              <a:t>Dual-Loop QR</a:t>
+            </a:r>
+            <a:endParaRPr lang="en-US" sz="1300" dirty="0"/>
+          </a:p>
+        </p:txBody>
+      </p:sp>
+      <p:sp>
+        <p:nvSpPr>
+          <p:cNvPr id="24" name="Text 22"/>
+          <p:cNvSpPr/>
+          <p:nvPr/>
+        </p:nvSpPr>
+        <p:spPr>
+          <a:xfrm>
+            <a:off x="4754880" y="4151376"/>
+            <a:ext cx="1828800" cy="228600"/>
+          </a:xfrm>
+          <a:prstGeom prst="rect">
+            <a:avLst/>
+          </a:prstGeom>
+          <a:noFill/>
+          <a:ln/>
+        </p:spPr>
+        <p:txBody>
+          <a:bodyPr wrap="square" rtlCol="0" anchor="ctr"/>
+          <a:lstStyle/>
+          <a:p>
+            <a:pPr algn="ctr" indent="0" marL="0">
+              <a:buNone/>
+            </a:pPr>
+            <a:r>
+              <a:rPr lang="en-US" sz="800" b="1" dirty="0">
+                <a:solidFill>
+                  <a:srgbClr val="94A3B8"/>
+                </a:solidFill>
+                <a:latin typeface="Calibri" pitchFamily="34" charset="0"/>
+                <a:ea typeface="Calibri" pitchFamily="34" charset="-122"/>
+                <a:cs typeface="Calibri" pitchFamily="34" charset="-120"/>
+              </a:rPr>
+              <a:t>Digital Product Passport</a:t>
+            </a:r>
+            <a:endParaRPr lang="en-US" sz="800" dirty="0"/>
+          </a:p>
+        </p:txBody>
+      </p:sp>
+      <p:sp>
+        <p:nvSpPr>
+          <p:cNvPr id="25" name="Shape 23"/>
+          <p:cNvSpPr/>
+          <p:nvPr/>
+        </p:nvSpPr>
+        <p:spPr>
+          <a:xfrm>
+            <a:off x="6766560" y="3794760"/>
+            <a:ext cx="1828800" cy="658368"/>
+          </a:xfrm>
+          <a:prstGeom prst="roundRect">
+            <a:avLst>
+              <a:gd name="adj" fmla="val 11111"/>
             </a:avLst>
           </a:prstGeom>
           <a:solidFill>
@@ -3684,30 +4340,30 @@
       </p:sp>
       <p:sp>
         <p:nvSpPr>
-          <p:cNvPr id="7" name="Text 5"/>
-          <p:cNvSpPr/>
-          <p:nvPr/>
-        </p:nvSpPr>
-        <p:spPr>
-          <a:xfrm>
-            <a:off x="731520" y="1353312"/>
-            <a:ext cx="3520440" cy="256032"/>
-          </a:xfrm>
-          <a:prstGeom prst="rect">
-            <a:avLst/>
-          </a:prstGeom>
-          <a:noFill/>
-          <a:ln/>
-        </p:spPr>
-        <p:txBody>
-          <a:bodyPr wrap="square" rtlCol="0" anchor="ctr"/>
-          <a:lstStyle/>
-          <a:p>
-            <a:pPr indent="0" marL="0">
-              <a:buNone/>
-            </a:pPr>
-            <a:r>
-              <a:rPr lang="en-US" sz="1250" b="1" dirty="0">
+          <p:cNvPr id="26" name="Text 24"/>
+          <p:cNvSpPr/>
+          <p:nvPr/>
+        </p:nvSpPr>
+        <p:spPr>
+          <a:xfrm>
+            <a:off x="6766560" y="3840480"/>
+            <a:ext cx="1828800" cy="292608"/>
+          </a:xfrm>
+          <a:prstGeom prst="rect">
+            <a:avLst/>
+          </a:prstGeom>
+          <a:noFill/>
+          <a:ln/>
+        </p:spPr>
+        <p:txBody>
+          <a:bodyPr wrap="square" rtlCol="0" anchor="ctr"/>
+          <a:lstStyle/>
+          <a:p>
+            <a:pPr algn="ctr" indent="0" marL="0">
+              <a:buNone/>
+            </a:pPr>
+            <a:r>
+              <a:rPr lang="en-US" sz="1300" b="1" dirty="0">
                 <a:solidFill>
                   <a:srgbClr val="FB7185"/>
                 </a:solidFill>
@@ -3715,400 +4371,38 @@
                 <a:ea typeface="Calibri" pitchFamily="34" charset="-122"/>
                 <a:cs typeface="Calibri" pitchFamily="34" charset="-120"/>
               </a:rPr>
-              <a:t>1. The Trust &amp; Visibility Void</a:t>
-            </a:r>
-            <a:endParaRPr lang="en-US" sz="1250" dirty="0"/>
-          </a:p>
-        </p:txBody>
-      </p:sp>
-      <p:sp>
-        <p:nvSpPr>
-          <p:cNvPr id="8" name="Text 6"/>
-          <p:cNvSpPr/>
-          <p:nvPr/>
-        </p:nvSpPr>
-        <p:spPr>
-          <a:xfrm>
-            <a:off x="731520" y="1645920"/>
-            <a:ext cx="3520440" cy="1325880"/>
-          </a:xfrm>
-          <a:prstGeom prst="rect">
-            <a:avLst/>
-          </a:prstGeom>
-          <a:noFill/>
-          <a:ln/>
-        </p:spPr>
-        <p:txBody>
-          <a:bodyPr wrap="square" rtlCol="0" anchor="ctr"/>
-          <a:lstStyle/>
-          <a:p>
-            <a:pPr marL="342900" indent="-342900">
-              <a:lnSpc>
-                <a:spcPct val="115000"/>
-              </a:lnSpc>
-              <a:spcAft>
-                <a:spcPts val="400"/>
-              </a:spcAft>
-              <a:buSzPct val="100000"/>
-              <a:buChar char="•"/>
-            </a:pPr>
-            <a:r>
-              <a:rPr lang="en-US" sz="920" dirty="0">
-                <a:solidFill>
-                  <a:srgbClr val="CBD5E1"/>
-                </a:solidFill>
-                <a:latin typeface="Calibri" pitchFamily="34" charset="0"/>
-                <a:ea typeface="Calibri" pitchFamily="34" charset="-122"/>
-                <a:cs typeface="Calibri" pitchFamily="34" charset="-120"/>
-              </a:rPr>
-              <a:t>Consumers discard repairable electronics assuming replacement is the only safe option.</a:t>
-            </a:r>
-            <a:endParaRPr lang="en-US" sz="920" dirty="0"/>
-          </a:p>
-          <a:p>
-            <a:pPr marL="342900" indent="-342900">
-              <a:lnSpc>
-                <a:spcPct val="115000"/>
-              </a:lnSpc>
-              <a:spcAft>
-                <a:spcPts val="400"/>
-              </a:spcAft>
-              <a:buSzPct val="100000"/>
-              <a:buChar char="•"/>
-            </a:pPr>
-            <a:r>
-              <a:rPr lang="en-US" sz="920" dirty="0">
-                <a:solidFill>
-                  <a:srgbClr val="CBD5E1"/>
-                </a:solidFill>
-                <a:latin typeface="Calibri" pitchFamily="34" charset="0"/>
-                <a:ea typeface="Calibri" pitchFamily="34" charset="-122"/>
-                <a:cs typeface="Calibri" pitchFamily="34" charset="-120"/>
-              </a:rPr>
-              <a:t>Roadside repair artisans lack digital storefronts, standardized pricing, and formal warranty tracking.</a:t>
-            </a:r>
-            <a:endParaRPr lang="en-US" sz="920" dirty="0"/>
-          </a:p>
-          <a:p>
-            <a:pPr marL="342900" indent="-342900">
-              <a:lnSpc>
-                <a:spcPct val="115000"/>
-              </a:lnSpc>
-              <a:spcAft>
-                <a:spcPts val="400"/>
-              </a:spcAft>
-              <a:buSzPct val="100000"/>
-              <a:buChar char="•"/>
-            </a:pPr>
-            <a:r>
-              <a:rPr lang="en-US" sz="920" dirty="0">
-                <a:solidFill>
-                  <a:srgbClr val="CBD5E1"/>
-                </a:solidFill>
-                <a:latin typeface="Calibri" pitchFamily="34" charset="0"/>
-                <a:ea typeface="Calibri" pitchFamily="34" charset="-122"/>
-                <a:cs typeface="Calibri" pitchFamily="34" charset="-120"/>
-              </a:rPr>
-              <a:t>Consumers fear arbitrary overcharging, counterfeit parts, and shoddy workmanship.</a:t>
-            </a:r>
-            <a:endParaRPr lang="en-US" sz="920" dirty="0"/>
-          </a:p>
-        </p:txBody>
-      </p:sp>
-      <p:sp>
-        <p:nvSpPr>
-          <p:cNvPr id="9" name="Shape 7"/>
-          <p:cNvSpPr/>
-          <p:nvPr/>
-        </p:nvSpPr>
-        <p:spPr>
-          <a:xfrm>
-            <a:off x="4709160" y="1234440"/>
-            <a:ext cx="3886200" cy="1874520"/>
-          </a:xfrm>
-          <a:prstGeom prst="roundRect">
-            <a:avLst>
-              <a:gd name="adj" fmla="val 3902"/>
-            </a:avLst>
-          </a:prstGeom>
-          <a:solidFill>
-            <a:srgbClr val="2A0E17"/>
-          </a:solidFill>
-          <a:ln w="12700">
-            <a:solidFill>
-              <a:srgbClr val="E11D48"/>
-            </a:solidFill>
-            <a:prstDash val="solid"/>
-          </a:ln>
-        </p:spPr>
-      </p:sp>
-      <p:sp>
-        <p:nvSpPr>
-          <p:cNvPr id="10" name="Text 8"/>
-          <p:cNvSpPr/>
-          <p:nvPr/>
-        </p:nvSpPr>
-        <p:spPr>
-          <a:xfrm>
-            <a:off x="4892040" y="1353312"/>
-            <a:ext cx="3520440" cy="256032"/>
-          </a:xfrm>
-          <a:prstGeom prst="rect">
-            <a:avLst/>
-          </a:prstGeom>
-          <a:noFill/>
-          <a:ln/>
-        </p:spPr>
-        <p:txBody>
-          <a:bodyPr wrap="square" rtlCol="0" anchor="ctr"/>
-          <a:lstStyle/>
-          <a:p>
-            <a:pPr indent="0" marL="0">
-              <a:buNone/>
-            </a:pPr>
-            <a:r>
-              <a:rPr lang="en-US" sz="1250" b="1" dirty="0">
-                <a:solidFill>
-                  <a:srgbClr val="FB7185"/>
-                </a:solidFill>
-                <a:latin typeface="Calibri" pitchFamily="34" charset="0"/>
-                <a:ea typeface="Calibri" pitchFamily="34" charset="-122"/>
-                <a:cs typeface="Calibri" pitchFamily="34" charset="-120"/>
-              </a:rPr>
-              <a:t>2. The Hardware Diagnostic Void (Root Cause)</a:t>
-            </a:r>
-            <a:endParaRPr lang="en-US" sz="1250" dirty="0"/>
-          </a:p>
-        </p:txBody>
-      </p:sp>
-      <p:sp>
-        <p:nvSpPr>
-          <p:cNvPr id="11" name="Text 9"/>
-          <p:cNvSpPr/>
-          <p:nvPr/>
-        </p:nvSpPr>
-        <p:spPr>
-          <a:xfrm>
-            <a:off x="4892040" y="1645920"/>
-            <a:ext cx="3520440" cy="1325880"/>
-          </a:xfrm>
-          <a:prstGeom prst="rect">
-            <a:avLst/>
-          </a:prstGeom>
-          <a:noFill/>
-          <a:ln/>
-        </p:spPr>
-        <p:txBody>
-          <a:bodyPr wrap="square" rtlCol="0" anchor="ctr"/>
-          <a:lstStyle/>
-          <a:p>
-            <a:pPr marL="342900" indent="-342900">
-              <a:lnSpc>
-                <a:spcPct val="115000"/>
-              </a:lnSpc>
-              <a:spcAft>
-                <a:spcPts val="400"/>
-              </a:spcAft>
-              <a:buSzPct val="100000"/>
-              <a:buChar char="•"/>
-            </a:pPr>
-            <a:r>
-              <a:rPr lang="en-US" sz="920" dirty="0">
-                <a:solidFill>
-                  <a:srgbClr val="CBD5E1"/>
-                </a:solidFill>
-                <a:latin typeface="Calibri" pitchFamily="34" charset="0"/>
-                <a:ea typeface="Calibri" pitchFamily="34" charset="-122"/>
-                <a:cs typeface="Calibri" pitchFamily="34" charset="-120"/>
-              </a:rPr>
-              <a:t>Lab oscilloscopes &amp; inspection microscopes cost ₹1,00,000 to ₹1,50,000—unaffordable for local mechanics.</a:t>
-            </a:r>
-            <a:endParaRPr lang="en-US" sz="920" dirty="0"/>
-          </a:p>
-          <a:p>
-            <a:pPr marL="342900" indent="-342900">
-              <a:lnSpc>
-                <a:spcPct val="115000"/>
-              </a:lnSpc>
-              <a:spcAft>
-                <a:spcPts val="400"/>
-              </a:spcAft>
-              <a:buSzPct val="100000"/>
-              <a:buChar char="•"/>
-            </a:pPr>
-            <a:r>
-              <a:rPr lang="en-US" sz="920" dirty="0">
-                <a:solidFill>
-                  <a:srgbClr val="CBD5E1"/>
-                </a:solidFill>
-                <a:latin typeface="Calibri" pitchFamily="34" charset="0"/>
-                <a:ea typeface="Calibri" pitchFamily="34" charset="-122"/>
-                <a:cs typeface="Calibri" pitchFamily="34" charset="-120"/>
-              </a:rPr>
-              <a:t>Crude multimeters cause accidental voltage spikes, frying delicate microprocessors.</a:t>
-            </a:r>
-            <a:endParaRPr lang="en-US" sz="920" dirty="0"/>
-          </a:p>
-          <a:p>
-            <a:pPr marL="342900" indent="-342900">
-              <a:lnSpc>
-                <a:spcPct val="115000"/>
-              </a:lnSpc>
-              <a:spcAft>
-                <a:spcPts val="400"/>
-              </a:spcAft>
-              <a:buSzPct val="100000"/>
-              <a:buChar char="•"/>
-            </a:pPr>
-            <a:r>
-              <a:rPr lang="en-US" sz="920" dirty="0">
-                <a:solidFill>
-                  <a:srgbClr val="CBD5E1"/>
-                </a:solidFill>
-                <a:latin typeface="Calibri" pitchFamily="34" charset="0"/>
-                <a:ea typeface="Calibri" pitchFamily="34" charset="-122"/>
-                <a:cs typeface="Calibri" pitchFamily="34" charset="-120"/>
-              </a:rPr>
-              <a:t>Micro-faults are invisible to naked eyes; without photo proof, consumers distrust technicians.</a:t>
-            </a:r>
-            <a:endParaRPr lang="en-US" sz="920" dirty="0"/>
-          </a:p>
-        </p:txBody>
-      </p:sp>
-      <p:sp>
-        <p:nvSpPr>
-          <p:cNvPr id="12" name="Shape 10"/>
-          <p:cNvSpPr/>
-          <p:nvPr/>
-        </p:nvSpPr>
-        <p:spPr>
-          <a:xfrm>
-            <a:off x="548640" y="3246120"/>
-            <a:ext cx="2560320" cy="1234440"/>
-          </a:xfrm>
-          <a:prstGeom prst="roundRect">
-            <a:avLst>
-              <a:gd name="adj" fmla="val 5926"/>
-            </a:avLst>
-          </a:prstGeom>
-          <a:solidFill>
-            <a:srgbClr val="111827"/>
-          </a:solidFill>
-          <a:ln w="12700">
-            <a:solidFill>
-              <a:srgbClr val="1F293D"/>
-            </a:solidFill>
-            <a:prstDash val="solid"/>
-          </a:ln>
-        </p:spPr>
-      </p:sp>
-      <p:sp>
-        <p:nvSpPr>
-          <p:cNvPr id="13" name="Text 11"/>
-          <p:cNvSpPr/>
-          <p:nvPr/>
-        </p:nvSpPr>
-        <p:spPr>
-          <a:xfrm>
-            <a:off x="685800" y="3337560"/>
-            <a:ext cx="2286000" cy="292608"/>
-          </a:xfrm>
-          <a:prstGeom prst="rect">
-            <a:avLst/>
-          </a:prstGeom>
-          <a:noFill/>
-          <a:ln/>
-        </p:spPr>
-        <p:txBody>
-          <a:bodyPr wrap="square" rtlCol="0" anchor="ctr"/>
-          <a:lstStyle/>
-          <a:p>
-            <a:pPr indent="0" marL="0">
-              <a:buNone/>
-            </a:pPr>
-            <a:r>
-              <a:rPr lang="en-US" sz="1600" b="1" dirty="0">
-                <a:solidFill>
-                  <a:srgbClr val="FB7185"/>
-                </a:solidFill>
-                <a:latin typeface="Calibri" pitchFamily="34" charset="0"/>
-                <a:ea typeface="Calibri" pitchFamily="34" charset="-122"/>
-                <a:cs typeface="Calibri" pitchFamily="34" charset="-120"/>
-              </a:rPr>
-              <a:t>₹1.2L Cr</a:t>
-            </a:r>
-            <a:endParaRPr lang="en-US" sz="1600" dirty="0"/>
-          </a:p>
-        </p:txBody>
-      </p:sp>
-      <p:sp>
-        <p:nvSpPr>
-          <p:cNvPr id="14" name="Text 12"/>
-          <p:cNvSpPr/>
-          <p:nvPr/>
-        </p:nvSpPr>
-        <p:spPr>
-          <a:xfrm>
-            <a:off x="685800" y="3639312"/>
-            <a:ext cx="2286000" cy="201168"/>
-          </a:xfrm>
-          <a:prstGeom prst="rect">
-            <a:avLst/>
-          </a:prstGeom>
-          <a:noFill/>
-          <a:ln/>
-        </p:spPr>
-        <p:txBody>
-          <a:bodyPr wrap="square" rtlCol="0" anchor="ctr"/>
-          <a:lstStyle/>
-          <a:p>
-            <a:pPr indent="0" marL="0">
-              <a:buNone/>
-            </a:pPr>
-            <a:r>
-              <a:rPr lang="en-US" sz="900" b="1" dirty="0">
-                <a:solidFill>
-                  <a:srgbClr val="FFFFFF"/>
-                </a:solidFill>
-                <a:latin typeface="Calibri" pitchFamily="34" charset="0"/>
-                <a:ea typeface="Calibri" pitchFamily="34" charset="-122"/>
-                <a:cs typeface="Calibri" pitchFamily="34" charset="-120"/>
-              </a:rPr>
-              <a:t>THE LOST VALUE</a:t>
-            </a:r>
-            <a:endParaRPr lang="en-US" sz="900" dirty="0"/>
-          </a:p>
-        </p:txBody>
-      </p:sp>
-      <p:sp>
-        <p:nvSpPr>
-          <p:cNvPr id="15" name="Text 13"/>
-          <p:cNvSpPr/>
-          <p:nvPr/>
-        </p:nvSpPr>
-        <p:spPr>
-          <a:xfrm>
-            <a:off x="685800" y="3858768"/>
-            <a:ext cx="2286000" cy="548640"/>
-          </a:xfrm>
-          <a:prstGeom prst="rect">
-            <a:avLst/>
-          </a:prstGeom>
-          <a:noFill/>
-          <a:ln/>
-        </p:spPr>
-        <p:txBody>
-          <a:bodyPr wrap="square" rtlCol="0" anchor="ctr"/>
-          <a:lstStyle/>
-          <a:p>
-            <a:pPr indent="0" marL="0">
-              <a:lnSpc>
-                <a:spcPct val="115000"/>
-              </a:lnSpc>
-              <a:buNone/>
-            </a:pPr>
-            <a:r>
-              <a:rPr lang="en-US" sz="850" dirty="0">
+              <a:t>Mission LiFE</a:t>
+            </a:r>
+            <a:endParaRPr lang="en-US" sz="1300" dirty="0"/>
+          </a:p>
+        </p:txBody>
+      </p:sp>
+      <p:sp>
+        <p:nvSpPr>
+          <p:cNvPr id="27" name="Text 25"/>
+          <p:cNvSpPr/>
+          <p:nvPr/>
+        </p:nvSpPr>
+        <p:spPr>
+          <a:xfrm>
+            <a:off x="6766560" y="4151376"/>
+            <a:ext cx="1828800" cy="228600"/>
+          </a:xfrm>
+          <a:prstGeom prst="rect">
+            <a:avLst/>
+          </a:prstGeom>
+          <a:noFill/>
+          <a:ln/>
+        </p:spPr>
+        <p:txBody>
+          <a:bodyPr wrap="square" rtlCol="0" anchor="ctr"/>
+          <a:lstStyle/>
+          <a:p>
+            <a:pPr algn="ctr" indent="0" marL="0">
+              <a:buNone/>
+            </a:pPr>
+            <a:r>
+              <a:rPr lang="en-US" sz="800" b="1" dirty="0">
                 <a:solidFill>
                   <a:srgbClr val="94A3B8"/>
                 </a:solidFill>
@@ -4116,309 +4410,15 @@
                 <a:ea typeface="Calibri" pitchFamily="34" charset="-122"/>
                 <a:cs typeface="Calibri" pitchFamily="34" charset="-120"/>
               </a:rPr>
-              <a:t>Billions wasted buying new replacements when only a ₹50 micro-component had failed.</a:t>
-            </a:r>
-            <a:endParaRPr lang="en-US" sz="850" dirty="0"/>
-          </a:p>
-        </p:txBody>
-      </p:sp>
-      <p:sp>
-        <p:nvSpPr>
-          <p:cNvPr id="16" name="Shape 14"/>
-          <p:cNvSpPr/>
-          <p:nvPr/>
-        </p:nvSpPr>
-        <p:spPr>
-          <a:xfrm>
-            <a:off x="3291840" y="3246120"/>
-            <a:ext cx="2560320" cy="1234440"/>
-          </a:xfrm>
-          <a:prstGeom prst="roundRect">
-            <a:avLst>
-              <a:gd name="adj" fmla="val 5926"/>
-            </a:avLst>
-          </a:prstGeom>
-          <a:solidFill>
-            <a:srgbClr val="111827"/>
-          </a:solidFill>
-          <a:ln w="12700">
-            <a:solidFill>
-              <a:srgbClr val="1F293D"/>
-            </a:solidFill>
-            <a:prstDash val="solid"/>
-          </a:ln>
-        </p:spPr>
-      </p:sp>
-      <p:sp>
-        <p:nvSpPr>
-          <p:cNvPr id="17" name="Text 15"/>
-          <p:cNvSpPr/>
-          <p:nvPr/>
-        </p:nvSpPr>
-        <p:spPr>
-          <a:xfrm>
-            <a:off x="3429000" y="3337560"/>
-            <a:ext cx="2286000" cy="292608"/>
-          </a:xfrm>
-          <a:prstGeom prst="rect">
-            <a:avLst/>
-          </a:prstGeom>
-          <a:noFill/>
-          <a:ln/>
-        </p:spPr>
-        <p:txBody>
-          <a:bodyPr wrap="square" rtlCol="0" anchor="ctr"/>
-          <a:lstStyle/>
-          <a:p>
-            <a:pPr indent="0" marL="0">
-              <a:buNone/>
-            </a:pPr>
-            <a:r>
-              <a:rPr lang="en-US" sz="1600" b="1" dirty="0">
-                <a:solidFill>
-                  <a:srgbClr val="FBBF24"/>
-                </a:solidFill>
-                <a:latin typeface="Calibri" pitchFamily="34" charset="0"/>
-                <a:ea typeface="Calibri" pitchFamily="34" charset="-122"/>
-                <a:cs typeface="Calibri" pitchFamily="34" charset="-120"/>
-              </a:rPr>
-              <a:t>85%+</a:t>
-            </a:r>
-            <a:endParaRPr lang="en-US" sz="1600" dirty="0"/>
-          </a:p>
-        </p:txBody>
-      </p:sp>
-      <p:sp>
-        <p:nvSpPr>
-          <p:cNvPr id="18" name="Text 16"/>
-          <p:cNvSpPr/>
-          <p:nvPr/>
-        </p:nvSpPr>
-        <p:spPr>
-          <a:xfrm>
-            <a:off x="3429000" y="3639312"/>
-            <a:ext cx="2286000" cy="201168"/>
-          </a:xfrm>
-          <a:prstGeom prst="rect">
-            <a:avLst/>
-          </a:prstGeom>
-          <a:noFill/>
-          <a:ln/>
-        </p:spPr>
-        <p:txBody>
-          <a:bodyPr wrap="square" rtlCol="0" anchor="ctr"/>
-          <a:lstStyle/>
-          <a:p>
-            <a:pPr indent="0" marL="0">
-              <a:buNone/>
-            </a:pPr>
-            <a:r>
-              <a:rPr lang="en-US" sz="900" b="1" dirty="0">
-                <a:solidFill>
-                  <a:srgbClr val="FFFFFF"/>
-                </a:solidFill>
-                <a:latin typeface="Calibri" pitchFamily="34" charset="0"/>
-                <a:ea typeface="Calibri" pitchFamily="34" charset="-122"/>
-                <a:cs typeface="Calibri" pitchFamily="34" charset="-120"/>
-              </a:rPr>
-              <a:t>SKILLED HEROES OVERLOOKED</a:t>
-            </a:r>
-            <a:endParaRPr lang="en-US" sz="900" dirty="0"/>
-          </a:p>
-        </p:txBody>
-      </p:sp>
-      <p:sp>
-        <p:nvSpPr>
-          <p:cNvPr id="19" name="Text 17"/>
-          <p:cNvSpPr/>
-          <p:nvPr/>
-        </p:nvSpPr>
-        <p:spPr>
-          <a:xfrm>
-            <a:off x="3429000" y="3858768"/>
-            <a:ext cx="2286000" cy="548640"/>
-          </a:xfrm>
-          <a:prstGeom prst="rect">
-            <a:avLst/>
-          </a:prstGeom>
-          <a:noFill/>
-          <a:ln/>
-        </p:spPr>
-        <p:txBody>
-          <a:bodyPr wrap="square" rtlCol="0" anchor="ctr"/>
-          <a:lstStyle/>
-          <a:p>
-            <a:pPr indent="0" marL="0">
-              <a:lnSpc>
-                <a:spcPct val="115000"/>
-              </a:lnSpc>
-              <a:buNone/>
-            </a:pPr>
-            <a:r>
-              <a:rPr lang="en-US" sz="850" dirty="0">
-                <a:solidFill>
-                  <a:srgbClr val="94A3B8"/>
-                </a:solidFill>
-                <a:latin typeface="Calibri" pitchFamily="34" charset="0"/>
-                <a:ea typeface="Calibri" pitchFamily="34" charset="-122"/>
-                <a:cs typeface="Calibri" pitchFamily="34" charset="-120"/>
-              </a:rPr>
-              <a:t>Vast majority of neighborhood repairers remain informal, uncertified, and underpaid.</a:t>
-            </a:r>
-            <a:endParaRPr lang="en-US" sz="850" dirty="0"/>
-          </a:p>
-        </p:txBody>
-      </p:sp>
-      <p:sp>
-        <p:nvSpPr>
-          <p:cNvPr id="20" name="Shape 18"/>
-          <p:cNvSpPr/>
-          <p:nvPr/>
-        </p:nvSpPr>
-        <p:spPr>
-          <a:xfrm>
-            <a:off x="6035040" y="3246120"/>
-            <a:ext cx="2560320" cy="1234440"/>
-          </a:xfrm>
-          <a:prstGeom prst="roundRect">
-            <a:avLst>
-              <a:gd name="adj" fmla="val 5926"/>
-            </a:avLst>
-          </a:prstGeom>
-          <a:solidFill>
-            <a:srgbClr val="111827"/>
-          </a:solidFill>
-          <a:ln w="12700">
-            <a:solidFill>
-              <a:srgbClr val="1F293D"/>
-            </a:solidFill>
-            <a:prstDash val="solid"/>
-          </a:ln>
-        </p:spPr>
-      </p:sp>
-      <p:sp>
-        <p:nvSpPr>
-          <p:cNvPr id="21" name="Text 19"/>
-          <p:cNvSpPr/>
-          <p:nvPr/>
-        </p:nvSpPr>
-        <p:spPr>
-          <a:xfrm>
-            <a:off x="6172200" y="3337560"/>
-            <a:ext cx="2286000" cy="292608"/>
-          </a:xfrm>
-          <a:prstGeom prst="rect">
-            <a:avLst/>
-          </a:prstGeom>
-          <a:noFill/>
-          <a:ln/>
-        </p:spPr>
-        <p:txBody>
-          <a:bodyPr wrap="square" rtlCol="0" anchor="ctr"/>
-          <a:lstStyle/>
-          <a:p>
-            <a:pPr indent="0" marL="0">
-              <a:buNone/>
-            </a:pPr>
-            <a:r>
-              <a:rPr lang="en-US" sz="1600" b="1" dirty="0">
-                <a:solidFill>
-                  <a:srgbClr val="A78BFA"/>
-                </a:solidFill>
-                <a:latin typeface="Calibri" pitchFamily="34" charset="0"/>
-                <a:ea typeface="Calibri" pitchFamily="34" charset="-122"/>
-                <a:cs typeface="Calibri" pitchFamily="34" charset="-120"/>
-              </a:rPr>
-              <a:t>Millions</a:t>
-            </a:r>
-            <a:endParaRPr lang="en-US" sz="1600" dirty="0"/>
-          </a:p>
-        </p:txBody>
-      </p:sp>
-      <p:sp>
-        <p:nvSpPr>
-          <p:cNvPr id="22" name="Text 20"/>
-          <p:cNvSpPr/>
-          <p:nvPr/>
-        </p:nvSpPr>
-        <p:spPr>
-          <a:xfrm>
-            <a:off x="6172200" y="3639312"/>
-            <a:ext cx="2286000" cy="201168"/>
-          </a:xfrm>
-          <a:prstGeom prst="rect">
-            <a:avLst/>
-          </a:prstGeom>
-          <a:noFill/>
-          <a:ln/>
-        </p:spPr>
-        <p:txBody>
-          <a:bodyPr wrap="square" rtlCol="0" anchor="ctr"/>
-          <a:lstStyle/>
-          <a:p>
-            <a:pPr indent="0" marL="0">
-              <a:buNone/>
-            </a:pPr>
-            <a:r>
-              <a:rPr lang="en-US" sz="900" b="1" dirty="0">
-                <a:solidFill>
-                  <a:srgbClr val="FFFFFF"/>
-                </a:solidFill>
-                <a:latin typeface="Calibri" pitchFamily="34" charset="0"/>
-                <a:ea typeface="Calibri" pitchFamily="34" charset="-122"/>
-                <a:cs typeface="Calibri" pitchFamily="34" charset="-120"/>
-              </a:rPr>
-              <a:t>E-WASTE CATASTROPHE</a:t>
-            </a:r>
-            <a:endParaRPr lang="en-US" sz="900" dirty="0"/>
-          </a:p>
-        </p:txBody>
-      </p:sp>
-      <p:sp>
-        <p:nvSpPr>
-          <p:cNvPr id="23" name="Text 21"/>
-          <p:cNvSpPr/>
-          <p:nvPr/>
-        </p:nvSpPr>
-        <p:spPr>
-          <a:xfrm>
-            <a:off x="6172200" y="3858768"/>
-            <a:ext cx="2286000" cy="548640"/>
-          </a:xfrm>
-          <a:prstGeom prst="rect">
-            <a:avLst/>
-          </a:prstGeom>
-          <a:noFill/>
-          <a:ln/>
-        </p:spPr>
-        <p:txBody>
-          <a:bodyPr wrap="square" rtlCol="0" anchor="ctr"/>
-          <a:lstStyle/>
-          <a:p>
-            <a:pPr indent="0" marL="0">
-              <a:lnSpc>
-                <a:spcPct val="115000"/>
-              </a:lnSpc>
-              <a:buNone/>
-            </a:pPr>
-            <a:r>
-              <a:rPr lang="en-US" sz="850" dirty="0">
-                <a:solidFill>
-                  <a:srgbClr val="94A3B8"/>
-                </a:solidFill>
-                <a:latin typeface="Calibri" pitchFamily="34" charset="0"/>
-                <a:ea typeface="Calibri" pitchFamily="34" charset="-122"/>
-                <a:cs typeface="Calibri" pitchFamily="34" charset="-120"/>
-              </a:rPr>
-              <a:t>Repairable electronics flood municipal landfills, generating toxic heavy metal contamination.</a:t>
-            </a:r>
-            <a:endParaRPr lang="en-US" sz="850" dirty="0"/>
-          </a:p>
-        </p:txBody>
-      </p:sp>
-      <p:sp>
-        <p:nvSpPr>
-          <p:cNvPr id="24" name="Shape 22"/>
+              <a:t>E-Waste Mitigation Goal</a:t>
+            </a:r>
+            <a:endParaRPr lang="en-US" sz="800" dirty="0"/>
+          </a:p>
+        </p:txBody>
+      </p:sp>
+      <p:sp>
+        <p:nvSpPr>
+          <p:cNvPr id="28" name="Shape 26"/>
           <p:cNvSpPr/>
           <p:nvPr/>
         </p:nvSpPr>
@@ -4443,7 +4443,7 @@
       </p:sp>
       <p:sp>
         <p:nvSpPr>
-          <p:cNvPr id="25" name="Text 23"/>
+          <p:cNvPr id="29" name="Text 27"/>
           <p:cNvSpPr/>
           <p:nvPr/>
         </p:nvSpPr>
@@ -4488,7 +4488,7 @@
                 <a:ea typeface="Calibri" pitchFamily="34" charset="-122"/>
                 <a:cs typeface="Calibri" pitchFamily="34" charset="-120"/>
               </a:rPr>
-              <a:t>www.vytron.me</a:t>
+              <a:t>fixgrid.vytron.me</a:t>
             </a:r>
             <a:endParaRPr lang="en-US" sz="900" dirty="0"/>
           </a:p>
@@ -4496,7 +4496,7 @@
       </p:sp>
       <p:sp>
         <p:nvSpPr>
-          <p:cNvPr id="26" name="Text 24"/>
+          <p:cNvPr id="30" name="Text 28"/>
           <p:cNvSpPr/>
           <p:nvPr/>
         </p:nvSpPr>
@@ -4535,7 +4535,7 @@
       </p:sp>
       <p:sp>
         <p:nvSpPr>
-          <p:cNvPr id="27" name="Text 25"/>
+          <p:cNvPr id="31" name="Text 29"/>
           <p:cNvSpPr/>
           <p:nvPr/>
         </p:nvSpPr>
@@ -4734,7 +4734,7 @@
               <a:buNone/>
             </a:pPr>
             <a:r>
-              <a:rPr lang="en-US" sz="2300" b="1" dirty="0">
+              <a:rPr lang="en-US" sz="2200" b="1" dirty="0">
                 <a:solidFill>
                   <a:srgbClr val="FFFFFF"/>
                 </a:solidFill>
@@ -4744,7 +4744,7 @@
               </a:rPr>
               <a:t>SafeProbe™: Lab Diagnostics in a Handheld Wand</a:t>
             </a:r>
-            <a:endParaRPr lang="en-US" sz="2300" dirty="0"/>
+            <a:endParaRPr lang="en-US" sz="2200" dirty="0"/>
           </a:p>
         </p:txBody>
       </p:sp>
@@ -4856,7 +4856,7 @@
                 <a:ea typeface="Calibri" pitchFamily="34" charset="-122"/>
                 <a:cs typeface="Calibri" pitchFamily="34" charset="-120"/>
               </a:rPr>
-              <a:t>SafeProbe™ Working Prototype (₹1,200 / $14 BOM)</a:t>
+              <a:t>SafeProbe™ Working Prototype (₹1,795 / ~$21 BOM)</a:t>
             </a:r>
             <a:endParaRPr lang="en-US" sz="850" dirty="0"/>
           </a:p>
@@ -5378,7 +5378,7 @@
                 <a:ea typeface="Calibri" pitchFamily="34" charset="-122"/>
                 <a:cs typeface="Calibri" pitchFamily="34" charset="-120"/>
               </a:rPr>
-              <a:t>Tool writes a physical tamper-evident QR void seal placed over gadget seam. Customer scans to review diagnostic readings, before/after photos, and activates a guaranteed 30-day digital warranty.</a:t>
+              <a:t>Tool writes a physical tamper-evident QR void seal placed over device or appliance seam. Customer scans to review diagnostic readings, before/after photos, and activates a guaranteed 90-day digital warranty.</a:t>
             </a:r>
             <a:endParaRPr lang="en-US" sz="880" dirty="0"/>
           </a:p>
@@ -5456,7 +5456,7 @@
                 <a:ea typeface="Calibri" pitchFamily="34" charset="-122"/>
                 <a:cs typeface="Calibri" pitchFamily="34" charset="-120"/>
               </a:rPr>
-              <a:t>www.vytron.me</a:t>
+              <a:t>fixgrid.vytron.me</a:t>
             </a:r>
             <a:endParaRPr lang="en-US" sz="900" dirty="0"/>
           </a:p>
@@ -5702,7 +5702,7 @@
               <a:buNone/>
             </a:pPr>
             <a:r>
-              <a:rPr lang="en-US" sz="2300" b="1" dirty="0">
+              <a:rPr lang="en-US" sz="2200" b="1" dirty="0">
                 <a:solidFill>
                   <a:srgbClr val="FFFFFF"/>
                 </a:solidFill>
@@ -5710,9 +5710,9 @@
                 <a:ea typeface="Cambria" pitchFamily="34" charset="-122"/>
                 <a:cs typeface="Cambria" pitchFamily="34" charset="-120"/>
               </a:rPr>
-              <a:t>FixGrid Web Platform (www.vytron.me)</a:t>
-            </a:r>
-            <a:endParaRPr lang="en-US" sz="2300" dirty="0"/>
+              <a:t>FixGrid Web Platform (fixgrid.vytron.me)</a:t>
+            </a:r>
+            <a:endParaRPr lang="en-US" sz="2200" dirty="0"/>
           </a:p>
         </p:txBody>
       </p:sp>
@@ -5818,7 +5818,7 @@
                 <a:ea typeface="Calibri" pitchFamily="34" charset="-122"/>
                 <a:cs typeface="Calibri" pitchFamily="34" charset="-120"/>
               </a:rPr>
-              <a:t>Allows consumers to discover verified repair shops within walking distance across 21 repair categories (Phones, Laptops, Appliances, Watches) with live opening-hour status.</a:t>
+              <a:t>Allows consumers to discover verified repair shops within walking distance across 21+ categories (Major Home Appliances, ACs, Microwaves, Phones, Laptops, Power Tools, EVs) with live status.</a:t>
             </a:r>
             <a:endParaRPr lang="en-US" sz="850" dirty="0"/>
           </a:p>
@@ -6265,7 +6265,7 @@
                 <a:ea typeface="Calibri" pitchFamily="34" charset="-122"/>
                 <a:cs typeface="Calibri" pitchFamily="34" charset="-120"/>
               </a:rPr>
-              <a:t>Live Production Platform at www.vytron.me</a:t>
+              <a:t>Live Production Platform at fixgrid.vytron.me</a:t>
             </a:r>
             <a:endParaRPr lang="en-US" sz="850" dirty="0"/>
           </a:p>
@@ -6343,7 +6343,7 @@
                 <a:ea typeface="Calibri" pitchFamily="34" charset="-122"/>
                 <a:cs typeface="Calibri" pitchFamily="34" charset="-120"/>
               </a:rPr>
-              <a:t>www.vytron.me</a:t>
+              <a:t>fixgrid.vytron.me</a:t>
             </a:r>
             <a:endParaRPr lang="en-US" sz="900" dirty="0"/>
           </a:p>
@@ -6589,7 +6589,7 @@
               <a:buNone/>
             </a:pPr>
             <a:r>
-              <a:rPr lang="en-US" sz="2300" b="1" dirty="0">
+              <a:rPr lang="en-US" sz="2200" b="1" dirty="0">
                 <a:solidFill>
                   <a:srgbClr val="FFFFFF"/>
                 </a:solidFill>
@@ -6599,7 +6599,7 @@
               </a:rPr>
               <a:t>Dual-Loop QR Digital Product Passport</a:t>
             </a:r>
-            <a:endParaRPr lang="en-US" sz="2300" dirty="0"/>
+            <a:endParaRPr lang="en-US" sz="2200" dirty="0"/>
           </a:p>
         </p:txBody>
       </p:sp>
@@ -6858,7 +6858,7 @@
                 <a:ea typeface="Calibri" pitchFamily="34" charset="-122"/>
                 <a:cs typeface="Calibri" pitchFamily="34" charset="-120"/>
               </a:rPr>
-              <a:t>When the technician repairs the gadget, the SafeProbe wand syncs the passing impedance test and high-res macro photos directly to the FixGrid cloud database via ESP32 Wi-Fi/BLE.</a:t>
+              <a:t>When the technician completes the repair across any category, the SafeProbe wand syncs the passing impedance test and high-res macro photos directly to the FixGrid cloud database via ESP32 Wi-Fi/BLE.</a:t>
             </a:r>
             <a:endParaRPr lang="en-US" sz="850" dirty="0"/>
           </a:p>
@@ -7005,7 +7005,7 @@
                 <a:ea typeface="Calibri" pitchFamily="34" charset="-122"/>
                 <a:cs typeface="Calibri" pitchFamily="34" charset="-120"/>
               </a:rPr>
-              <a:t>A serialized, tamper-evident holographic QR void sticker is printed and affixed over the device seam. If anyone attempts to tamper with or open the device, the physical pattern breaks.</a:t>
+              <a:t>A serialized, tamper-evident holographic QR void sticker is printed and affixed over the device or appliance seam. If anyone attempts to tamper with or reopen the unit, the physical pattern breaks.</a:t>
             </a:r>
             <a:endParaRPr lang="en-US" sz="850" dirty="0"/>
           </a:p>
@@ -7152,7 +7152,7 @@
                 <a:ea typeface="Calibri" pitchFamily="34" charset="-122"/>
                 <a:cs typeface="Calibri" pitchFamily="34" charset="-120"/>
               </a:rPr>
-              <a:t>The customer scans the QR code with any standard smartphone camera. It displays component before/after photos, diagnostic health logs, and activates an ironclad 30-day digital warranty certificate.</a:t>
+              <a:t>The customer scans the QR code with any standard smartphone camera. It displays component before/after photos, diagnostic health logs, and activates an ironclad 90-day digital warranty certificate.</a:t>
             </a:r>
             <a:endParaRPr lang="en-US" sz="850" dirty="0"/>
           </a:p>
@@ -7230,7 +7230,7 @@
                 <a:ea typeface="Calibri" pitchFamily="34" charset="-122"/>
                 <a:cs typeface="Calibri" pitchFamily="34" charset="-120"/>
               </a:rPr>
-              <a:t>www.vytron.me</a:t>
+              <a:t>fixgrid.vytron.me</a:t>
             </a:r>
             <a:endParaRPr lang="en-US" sz="900" dirty="0"/>
           </a:p>
@@ -7476,7 +7476,7 @@
               <a:buNone/>
             </a:pPr>
             <a:r>
-              <a:rPr lang="en-US" sz="2300" b="1" dirty="0">
+              <a:rPr lang="en-US" sz="2200" b="1" dirty="0">
                 <a:solidFill>
                   <a:srgbClr val="FFFFFF"/>
                 </a:solidFill>
@@ -7486,7 +7486,7 @@
               </a:rPr>
               <a:t>Tapping the $15.2B Repair Economy</a:t>
             </a:r>
-            <a:endParaRPr lang="en-US" sz="2300" dirty="0"/>
+            <a:endParaRPr lang="en-US" sz="2200" dirty="0"/>
           </a:p>
         </p:txBody>
       </p:sp>
@@ -8423,7 +8423,7 @@
                 <a:ea typeface="Calibri" pitchFamily="34" charset="-122"/>
                 <a:cs typeface="Calibri" pitchFamily="34" charset="-120"/>
               </a:rPr>
-              <a:t>www.vytron.me</a:t>
+              <a:t>fixgrid.vytron.me</a:t>
             </a:r>
             <a:endParaRPr lang="en-US" sz="900" dirty="0"/>
           </a:p>
@@ -8669,7 +8669,7 @@
               <a:buNone/>
             </a:pPr>
             <a:r>
-              <a:rPr lang="en-US" sz="2300" b="1" dirty="0">
+              <a:rPr lang="en-US" sz="2200" b="1" dirty="0">
                 <a:solidFill>
                   <a:srgbClr val="FFFFFF"/>
                 </a:solidFill>
@@ -8679,7 +8679,7 @@
               </a:rPr>
               <a:t>A Movement Towards a Sustainable Repair Economy</a:t>
             </a:r>
-            <a:endParaRPr lang="en-US" sz="2300" dirty="0"/>
+            <a:endParaRPr lang="en-US" sz="2200" dirty="0"/>
           </a:p>
         </p:txBody>
       </p:sp>
@@ -9502,7 +9502,7 @@
                 <a:ea typeface="Calibri" pitchFamily="34" charset="-122"/>
                 <a:cs typeface="Calibri" pitchFamily="34" charset="-120"/>
               </a:rPr>
-              <a:t>www.vytron.me</a:t>
+              <a:t>fixgrid.vytron.me</a:t>
             </a:r>
             <a:endParaRPr lang="en-US" sz="1050" dirty="0"/>
           </a:p>
@@ -9580,7 +9580,7 @@
                 <a:ea typeface="Calibri" pitchFamily="34" charset="-122"/>
                 <a:cs typeface="Calibri" pitchFamily="34" charset="-120"/>
               </a:rPr>
-              <a:t>www.vytron.me</a:t>
+              <a:t>fixgrid.vytron.me</a:t>
             </a:r>
             <a:endParaRPr lang="en-US" sz="900" dirty="0"/>
           </a:p>

--- a/FixGrid_Innovation_Presentation.pptx
+++ b/FixGrid_Innovation_Presentation.pptx
@@ -509,7 +509,7 @@
           <a:p>
             <a:r>
               <a:rPr lang="en-US" dirty="0"/>
-              <a:t>Welcome. FixGrid unites a live web marketplace with a low-cost physical diagnostic wand, solving both the digital trust void and the technical hardware diagnostic barrier.</a:t>
+              <a:t>Welcome. FixGrid Probe unites a live web marketplace with a low-cost physical diagnostic wand, solving both the digital trust void and the technical hardware diagnostic barrier.</a:t>
             </a:r>
             <a:endParaRPr lang="en-US" dirty="0"/>
           </a:p>
@@ -685,7 +685,7 @@
           <a:p>
             <a:r>
               <a:rPr lang="en-US" dirty="0"/>
-              <a:t>From the synopsis: SafeProbe merges physics and digital governance. It tests in-circuit at 0.40V without desoldering, snaps macro photos of 0402 SMDs, links to a Dual-Loop QR warranty seal, and acts as a hardware trust-gate releasing escrow.</a:t>
+              <a:t>From the synopsis: FixGrid Probe merges physics and digital governance. It tests in-circuit at 0.40V without desoldering, snaps macro photos of 0402 SMDs, links to a Dual-Loop QR warranty seal, and acts as a hardware trust-gate releasing escrow.</a:t>
             </a:r>
             <a:endParaRPr lang="en-US" dirty="0"/>
           </a:p>
@@ -773,7 +773,7 @@
           <a:p>
             <a:r>
               <a:rPr lang="en-US" dirty="0"/>
-              <a:t>SafeProbe provides three capabilities in one wand: micro-touch fault sensing with instant beeps, macro photo proof sent to the phone, and a tamper-evident digital warranty seal.</a:t>
+              <a:t>FixGrid Probe provides three capabilities in one wand: micro-touch fault sensing with instant beeps, macro photo proof sent to the phone, and a tamper-evident digital warranty seal.</a:t>
             </a:r>
             <a:endParaRPr lang="en-US" dirty="0"/>
           </a:p>
@@ -949,7 +949,7 @@
           <a:p>
             <a:r>
               <a:rPr lang="en-US" dirty="0"/>
-              <a:t>This is where the magic happens: the SafeProbe hardware records the repair, generates a tamper-evident holographic QR seal, and the customer scans it on their phone to see verified before-and-after photos and activate their warranty.</a:t>
+              <a:t>This is where the magic happens: the FixGrid Probe hardware records the repair, generates a tamper-evident holographic QR seal, and the customer scans it on their phone to see verified before-and-after photos and activate their warranty.</a:t>
             </a:r>
             <a:endParaRPr lang="en-US" dirty="0"/>
           </a:p>
@@ -1125,7 +1125,7 @@
           <a:p>
             <a:r>
               <a:rPr lang="en-US" dirty="0"/>
-              <a:t>Thank you. FixGrid and SafeProbe demonstrate that with frugal engineering and digital trust, we can empower local artisans, save consumers money, and protect our environment from toxic e-waste.</a:t>
+              <a:t>Thank you. FixGrid and FixGrid Probe demonstrate that with frugal engineering and digital trust, we can empower local artisans, save consumers money, and protect our environment from toxic e-waste.</a:t>
             </a:r>
             <a:endParaRPr lang="en-US" dirty="0"/>
           </a:p>
@@ -1597,7 +1597,7 @@
                 <a:ea typeface="Cambria" pitchFamily="34" charset="-122"/>
                 <a:cs typeface="Cambria" pitchFamily="34" charset="-120"/>
               </a:rPr>
-              <a:t>FixGrid &amp; SafeProbe™</a:t>
+              <a:t>FixGrid Probe™</a:t>
             </a:r>
             <a:endParaRPr lang="en-US" sz="3800" dirty="0"/>
           </a:p>
@@ -1771,7 +1771,7 @@
                 <a:ea typeface="Calibri" pitchFamily="34" charset="-122"/>
                 <a:cs typeface="Calibri" pitchFamily="34" charset="-120"/>
               </a:rPr>
-              <a:t>✓  Physical Innovation: Under ₹1,800 SafeProbe™ sub-junction diagnostic wand</a:t>
+              <a:t>✓  Physical Innovation: Under ₹1,800 FixGrid Probe™ sub-junction diagnostic wand</a:t>
             </a:r>
             <a:endParaRPr lang="en-US" sz="950" dirty="0"/>
           </a:p>
@@ -2013,8 +2013,8 @@
         </p:nvSpPr>
         <p:spPr>
           <a:xfrm>
-            <a:off x="5257800" y="4005072"/>
-            <a:ext cx="2286000" cy="201168"/>
+            <a:off x="5166360" y="4005072"/>
+            <a:ext cx="2468880" cy="201168"/>
           </a:xfrm>
           <a:prstGeom prst="roundRect">
             <a:avLst>
@@ -2040,8 +2040,8 @@
         </p:nvSpPr>
         <p:spPr>
           <a:xfrm>
-            <a:off x="5257800" y="4005072"/>
-            <a:ext cx="2286000" cy="201168"/>
+            <a:off x="5166360" y="4005072"/>
+            <a:ext cx="2468880" cy="201168"/>
           </a:xfrm>
           <a:prstGeom prst="rect">
             <a:avLst/>
@@ -2065,7 +2065,7 @@
                 <a:ea typeface="Calibri" pitchFamily="34" charset="-122"/>
                 <a:cs typeface="Calibri" pitchFamily="34" charset="-120"/>
               </a:rPr>
-              <a:t>SafeProbe™ Working Prototype</a:t>
+              <a:t>FixGrid Probe™ Working Prototype</a:t>
             </a:r>
             <a:endParaRPr lang="en-US" sz="800" dirty="0"/>
           </a:p>
@@ -2182,7 +2182,7 @@
                 <a:ea typeface="Calibri" pitchFamily="34" charset="-122"/>
                 <a:cs typeface="Calibri" pitchFamily="34" charset="-120"/>
               </a:rPr>
-              <a:t>Live Web Platform  +  SafeProbe™ Frugal Diagnostics</a:t>
+              <a:t>Live Web Platform  +  FixGrid Probe™ Diagnostics</a:t>
             </a:r>
             <a:endParaRPr lang="en-US" sz="850" dirty="0"/>
           </a:p>
@@ -3275,7 +3275,7 @@
                 <a:ea typeface="Calibri" pitchFamily="34" charset="-122"/>
                 <a:cs typeface="Calibri" pitchFamily="34" charset="-120"/>
               </a:rPr>
-              <a:t>Live Web Platform  +  SafeProbe™ Frugal Diagnostics</a:t>
+              <a:t>Live Web Platform  +  FixGrid Probe™ Diagnostics</a:t>
             </a:r>
             <a:endParaRPr lang="en-US" sz="850" dirty="0"/>
           </a:p>
@@ -3872,7 +3872,7 @@
                 <a:ea typeface="Calibri" pitchFamily="34" charset="-122"/>
                 <a:cs typeface="Calibri" pitchFamily="34" charset="-120"/>
               </a:rPr>
-              <a:t>SafeProbe™ Multimodal Diagnostic Tool</a:t>
+              <a:t>FixGrid Probe™ Multimodal Diagnostic Tool</a:t>
             </a:r>
             <a:endParaRPr lang="en-US" sz="1250" dirty="0"/>
           </a:p>
@@ -4527,7 +4527,7 @@
                 <a:ea typeface="Calibri" pitchFamily="34" charset="-122"/>
                 <a:cs typeface="Calibri" pitchFamily="34" charset="-120"/>
               </a:rPr>
-              <a:t>Live Web Platform  +  SafeProbe™ Frugal Diagnostics</a:t>
+              <a:t>Live Web Platform  +  FixGrid Probe™ Diagnostics</a:t>
             </a:r>
             <a:endParaRPr lang="en-US" sz="850" dirty="0"/>
           </a:p>
@@ -4742,7 +4742,7 @@
                 <a:ea typeface="Cambria" pitchFamily="34" charset="-122"/>
                 <a:cs typeface="Cambria" pitchFamily="34" charset="-120"/>
               </a:rPr>
-              <a:t>SafeProbe™: Lab Diagnostics in a Handheld Wand</a:t>
+              <a:t>FixGrid Probe™: Lab Diagnostics in a Handheld Wand</a:t>
             </a:r>
             <a:endParaRPr lang="en-US" sz="2200" dirty="0"/>
           </a:p>
@@ -4856,7 +4856,7 @@
                 <a:ea typeface="Calibri" pitchFamily="34" charset="-122"/>
                 <a:cs typeface="Calibri" pitchFamily="34" charset="-120"/>
               </a:rPr>
-              <a:t>SafeProbe™ Working Prototype (₹1,795 / ~$21 BOM)</a:t>
+              <a:t>FixGrid Probe™ Working Prototype (₹1,795 / ~$21 BOM)</a:t>
             </a:r>
             <a:endParaRPr lang="en-US" sz="850" dirty="0"/>
           </a:p>
@@ -5495,7 +5495,7 @@
                 <a:ea typeface="Calibri" pitchFamily="34" charset="-122"/>
                 <a:cs typeface="Calibri" pitchFamily="34" charset="-120"/>
               </a:rPr>
-              <a:t>Live Web Platform  +  SafeProbe™ Frugal Diagnostics</a:t>
+              <a:t>Live Web Platform  +  FixGrid Probe™ Diagnostics</a:t>
             </a:r>
             <a:endParaRPr lang="en-US" sz="850" dirty="0"/>
           </a:p>
@@ -6382,7 +6382,7 @@
                 <a:ea typeface="Calibri" pitchFamily="34" charset="-122"/>
                 <a:cs typeface="Calibri" pitchFamily="34" charset="-120"/>
               </a:rPr>
-              <a:t>Live Web Platform  +  SafeProbe™ Frugal Diagnostics</a:t>
+              <a:t>Live Web Platform  +  FixGrid Probe™ Diagnostics</a:t>
             </a:r>
             <a:endParaRPr lang="en-US" sz="850" dirty="0"/>
           </a:p>
@@ -6816,7 +6816,7 @@
                 <a:ea typeface="Calibri" pitchFamily="34" charset="-122"/>
                 <a:cs typeface="Calibri" pitchFamily="34" charset="-120"/>
               </a:rPr>
-              <a:t>SafeProbe Diagnostics Upload</a:t>
+              <a:t>FixGrid Probe Diagnostics Upload</a:t>
             </a:r>
             <a:endParaRPr lang="en-US" sz="1150" dirty="0"/>
           </a:p>
@@ -6858,7 +6858,7 @@
                 <a:ea typeface="Calibri" pitchFamily="34" charset="-122"/>
                 <a:cs typeface="Calibri" pitchFamily="34" charset="-120"/>
               </a:rPr>
-              <a:t>When the technician completes the repair across any category, the SafeProbe wand syncs the passing impedance test and high-res macro photos directly to the FixGrid cloud database via ESP32 Wi-Fi/BLE.</a:t>
+              <a:t>When the technician completes the repair across any category, the FixGrid Probe wand syncs the passing impedance test and high-res macro photos directly to the FixGrid cloud database via ESP32 Wi-Fi/BLE.</a:t>
             </a:r>
             <a:endParaRPr lang="en-US" sz="850" dirty="0"/>
           </a:p>
@@ -7269,7 +7269,7 @@
                 <a:ea typeface="Calibri" pitchFamily="34" charset="-122"/>
                 <a:cs typeface="Calibri" pitchFamily="34" charset="-120"/>
               </a:rPr>
-              <a:t>Live Web Platform  +  SafeProbe™ Frugal Diagnostics</a:t>
+              <a:t>Live Web Platform  +  FixGrid Probe™ Diagnostics</a:t>
             </a:r>
             <a:endParaRPr lang="en-US" sz="850" dirty="0"/>
           </a:p>
@@ -8135,7 +8135,7 @@
                 <a:ea typeface="Calibri" pitchFamily="34" charset="-122"/>
                 <a:cs typeface="Calibri" pitchFamily="34" charset="-120"/>
               </a:rPr>
-              <a:t>Household repair pass: free SafeProbe diagnostics, zero booking fees &amp; 60-day warranty.</a:t>
+              <a:t>Household repair pass: free FixGrid Probe diagnostics, zero booking fees &amp; 60-day warranty.</a:t>
             </a:r>
             <a:endParaRPr lang="en-US" sz="850" dirty="0"/>
           </a:p>
@@ -8240,7 +8240,7 @@
                 <a:ea typeface="Calibri" pitchFamily="34" charset="-122"/>
                 <a:cs typeface="Calibri" pitchFamily="34" charset="-120"/>
               </a:rPr>
-              <a:t>SafeProbe firmware updates, warranty management, digital store CRM &amp; analytics.</a:t>
+              <a:t>FixGrid Probe firmware updates, warranty management, digital store CRM &amp; analytics.</a:t>
             </a:r>
             <a:endParaRPr lang="en-US" sz="850" dirty="0"/>
           </a:p>
@@ -8462,7 +8462,7 @@
                 <a:ea typeface="Calibri" pitchFamily="34" charset="-122"/>
                 <a:cs typeface="Calibri" pitchFamily="34" charset="-120"/>
               </a:rPr>
-              <a:t>Live Web Platform  +  SafeProbe™ Frugal Diagnostics</a:t>
+              <a:t>Live Web Platform  +  FixGrid Probe™ Diagnostics</a:t>
             </a:r>
             <a:endParaRPr lang="en-US" sz="850" dirty="0"/>
           </a:p>
@@ -8867,7 +8867,7 @@
                 <a:ea typeface="Calibri" pitchFamily="34" charset="-122"/>
                 <a:cs typeface="Calibri" pitchFamily="34" charset="-120"/>
               </a:rPr>
-              <a:t>Deploy 50 SafeProbe units across Mumbai electronics repair markets.</a:t>
+              <a:t>Deploy 50 FixGrid Probe units across Mumbai electronics repair markets.</a:t>
             </a:r>
             <a:endParaRPr lang="en-US" sz="950" dirty="0"/>
           </a:p>
@@ -9319,7 +9319,7 @@
                 <a:ea typeface="Calibri" pitchFamily="34" charset="-122"/>
                 <a:cs typeface="Calibri" pitchFamily="34" charset="-120"/>
               </a:rPr>
-              <a:t>Scale frugal SafeProbe tool manufacturing to local repairers nationwide.</a:t>
+              <a:t>Scale frugal FixGrid Probe tool manufacturing to local repairers nationwide.</a:t>
             </a:r>
             <a:endParaRPr lang="en-US" sz="950" dirty="0"/>
           </a:p>
@@ -9385,7 +9385,7 @@
                 <a:ea typeface="Calibri" pitchFamily="34" charset="-122"/>
                 <a:cs typeface="Calibri" pitchFamily="34" charset="-120"/>
               </a:rPr>
-              <a:t>FixGrid &amp; SafeProbe™ Ecosystem</a:t>
+              <a:t>FixGrid Probe™ Unified Ecosystem</a:t>
             </a:r>
             <a:endParaRPr lang="en-US" sz="1300" dirty="0"/>
           </a:p>
@@ -9619,7 +9619,7 @@
                 <a:ea typeface="Calibri" pitchFamily="34" charset="-122"/>
                 <a:cs typeface="Calibri" pitchFamily="34" charset="-120"/>
               </a:rPr>
-              <a:t>Live Web Platform  +  SafeProbe™ Frugal Diagnostics</a:t>
+              <a:t>Live Web Platform  +  FixGrid Probe™ Diagnostics</a:t>
             </a:r>
             <a:endParaRPr lang="en-US" sz="850" dirty="0"/>
           </a:p>
